--- a/Presentation Slide.pptx
+++ b/Presentation Slide.pptx
@@ -5,7 +5,7 @@
     <p:sldMasterId id="2147483648" r:id="rId1"/>
   </p:sldMasterIdLst>
   <p:notesMasterIdLst>
-    <p:notesMasterId r:id="rId23"/>
+    <p:notesMasterId r:id="rId22"/>
   </p:notesMasterIdLst>
   <p:sldIdLst>
     <p:sldId id="256" r:id="rId2"/>
@@ -26,9 +26,8 @@
     <p:sldId id="280" r:id="rId17"/>
     <p:sldId id="271" r:id="rId18"/>
     <p:sldId id="267" r:id="rId19"/>
-    <p:sldId id="269" r:id="rId20"/>
-    <p:sldId id="281" r:id="rId21"/>
-    <p:sldId id="270" r:id="rId22"/>
+    <p:sldId id="281" r:id="rId20"/>
+    <p:sldId id="270" r:id="rId21"/>
   </p:sldIdLst>
   <p:sldSz cx="12192000" cy="6858000"/>
   <p:notesSz cx="6858000" cy="9144000"/>
@@ -138,7 +137,7 @@
 <file path=ppt/revisionInfo.xml><?xml version="1.0" encoding="utf-8"?>
 <p1510:revInfo xmlns:a="http://schemas.openxmlformats.org/drawingml/2006/main" xmlns:r="http://schemas.openxmlformats.org/officeDocument/2006/relationships" xmlns:p1510="http://schemas.microsoft.com/office/powerpoint/2015/10/main">
   <p1510:revLst>
-    <p1510:client id="{C4544894-D867-44A0-B68C-839EBDBEB325}" v="133" dt="2026-04-20T14:42:45.492"/>
+    <p1510:client id="{C4544894-D867-44A0-B68C-839EBDBEB325}" v="181" dt="2026-04-21T09:16:43.129"/>
   </p1510:revLst>
 </p1510:revInfo>
 </file>
@@ -147,8 +146,8 @@
 <pc:chgInfo xmlns:a="http://schemas.openxmlformats.org/drawingml/2006/main" xmlns:r="http://schemas.openxmlformats.org/officeDocument/2006/relationships" xmlns:ac="http://schemas.microsoft.com/office/drawing/2013/main/command" xmlns:pc="http://schemas.microsoft.com/office/powerpoint/2013/main/command">
   <pc:docChgLst>
     <pc:chgData name="安珠 山田" userId="6e1c022d408fe718" providerId="LiveId" clId="{AB092387-110A-496A-ABD5-B0DDE6F9411E}"/>
-    <pc:docChg chg="undo custSel addSld delSld modSld sldOrd">
-      <pc:chgData name="安珠 山田" userId="6e1c022d408fe718" providerId="LiveId" clId="{AB092387-110A-496A-ABD5-B0DDE6F9411E}" dt="2026-04-20T14:50:58.009" v="1549" actId="1076"/>
+    <pc:docChg chg="undo redo custSel addSld delSld modSld sldOrd">
+      <pc:chgData name="安珠 山田" userId="6e1c022d408fe718" providerId="LiveId" clId="{AB092387-110A-496A-ABD5-B0DDE6F9411E}" dt="2026-04-21T09:17:11.069" v="1887" actId="20577"/>
       <pc:docMkLst>
         <pc:docMk/>
       </pc:docMkLst>
@@ -326,13 +325,13 @@
         </pc:spChg>
       </pc:sldChg>
       <pc:sldChg chg="addSp delSp modSp mod setBg modNotesTx">
-        <pc:chgData name="安珠 山田" userId="6e1c022d408fe718" providerId="LiveId" clId="{AB092387-110A-496A-ABD5-B0DDE6F9411E}" dt="2026-04-20T14:25:25.251" v="1284" actId="113"/>
+        <pc:chgData name="安珠 山田" userId="6e1c022d408fe718" providerId="LiveId" clId="{AB092387-110A-496A-ABD5-B0DDE6F9411E}" dt="2026-04-21T08:18:40.386" v="1590" actId="14100"/>
         <pc:sldMkLst>
           <pc:docMk/>
           <pc:sldMk cId="1158265319" sldId="259"/>
         </pc:sldMkLst>
         <pc:spChg chg="mod">
-          <ac:chgData name="安珠 山田" userId="6e1c022d408fe718" providerId="LiveId" clId="{AB092387-110A-496A-ABD5-B0DDE6F9411E}" dt="2026-04-20T14:18:50.244" v="1265" actId="1076"/>
+          <ac:chgData name="安珠 山田" userId="6e1c022d408fe718" providerId="LiveId" clId="{AB092387-110A-496A-ABD5-B0DDE6F9411E}" dt="2026-04-21T08:18:40.386" v="1590" actId="14100"/>
           <ac:spMkLst>
             <pc:docMk/>
             <pc:sldMk cId="1158265319" sldId="259"/>
@@ -340,7 +339,7 @@
           </ac:spMkLst>
         </pc:spChg>
         <pc:spChg chg="mod">
-          <ac:chgData name="安珠 山田" userId="6e1c022d408fe718" providerId="LiveId" clId="{AB092387-110A-496A-ABD5-B0DDE6F9411E}" dt="2026-04-20T14:25:25.251" v="1284" actId="113"/>
+          <ac:chgData name="安珠 山田" userId="6e1c022d408fe718" providerId="LiveId" clId="{AB092387-110A-496A-ABD5-B0DDE6F9411E}" dt="2026-04-21T08:18:35.977" v="1587" actId="1076"/>
           <ac:spMkLst>
             <pc:docMk/>
             <pc:sldMk cId="1158265319" sldId="259"/>
@@ -373,13 +372,13 @@
         </pc:cxnChg>
       </pc:sldChg>
       <pc:sldChg chg="addSp delSp modSp mod ord setBg">
-        <pc:chgData name="安珠 山田" userId="6e1c022d408fe718" providerId="LiveId" clId="{AB092387-110A-496A-ABD5-B0DDE6F9411E}" dt="2026-04-20T14:18:16.901" v="1230" actId="255"/>
+        <pc:chgData name="安珠 山田" userId="6e1c022d408fe718" providerId="LiveId" clId="{AB092387-110A-496A-ABD5-B0DDE6F9411E}" dt="2026-04-21T08:18:46.345" v="1594" actId="20577"/>
         <pc:sldMkLst>
           <pc:docMk/>
           <pc:sldMk cId="782421446" sldId="260"/>
         </pc:sldMkLst>
         <pc:spChg chg="mod">
-          <ac:chgData name="安珠 山田" userId="6e1c022d408fe718" providerId="LiveId" clId="{AB092387-110A-496A-ABD5-B0DDE6F9411E}" dt="2026-04-20T14:18:16.901" v="1230" actId="255"/>
+          <ac:chgData name="安珠 山田" userId="6e1c022d408fe718" providerId="LiveId" clId="{AB092387-110A-496A-ABD5-B0DDE6F9411E}" dt="2026-04-21T08:18:46.345" v="1594" actId="20577"/>
           <ac:spMkLst>
             <pc:docMk/>
             <pc:sldMk cId="782421446" sldId="260"/>
@@ -392,6 +391,14 @@
             <pc:docMk/>
             <pc:sldMk cId="782421446" sldId="260"/>
             <ac:spMk id="3" creationId="{77F916F2-1FD0-99C1-6C45-9B55F34B57EC}"/>
+          </ac:spMkLst>
+        </pc:spChg>
+        <pc:spChg chg="add del mod">
+          <ac:chgData name="安珠 山田" userId="6e1c022d408fe718" providerId="LiveId" clId="{AB092387-110A-496A-ABD5-B0DDE6F9411E}" dt="2026-04-21T08:01:48.656" v="1560" actId="478"/>
+          <ac:spMkLst>
+            <pc:docMk/>
+            <pc:sldMk cId="782421446" sldId="260"/>
+            <ac:spMk id="5" creationId="{B313989A-CC69-DFDF-EDE5-60309956000F}"/>
           </ac:spMkLst>
         </pc:spChg>
         <pc:spChg chg="add del">
@@ -826,7 +833,7 @@
         </pc:sldMkLst>
       </pc:sldChg>
       <pc:sldChg chg="addSp modSp mod ord setBg">
-        <pc:chgData name="安珠 山田" userId="6e1c022d408fe718" providerId="LiveId" clId="{AB092387-110A-496A-ABD5-B0DDE6F9411E}" dt="2026-04-20T14:50:27.664" v="1542"/>
+        <pc:chgData name="安珠 山田" userId="6e1c022d408fe718" providerId="LiveId" clId="{AB092387-110A-496A-ABD5-B0DDE6F9411E}" dt="2026-04-21T07:59:04.397" v="1557" actId="5793"/>
         <pc:sldMkLst>
           <pc:docMk/>
           <pc:sldMk cId="880069333" sldId="263"/>
@@ -840,7 +847,7 @@
           </ac:spMkLst>
         </pc:spChg>
         <pc:spChg chg="mod">
-          <ac:chgData name="安珠 山田" userId="6e1c022d408fe718" providerId="LiveId" clId="{AB092387-110A-496A-ABD5-B0DDE6F9411E}" dt="2026-04-20T14:17:31.775" v="1223" actId="207"/>
+          <ac:chgData name="安珠 山田" userId="6e1c022d408fe718" providerId="LiveId" clId="{AB092387-110A-496A-ABD5-B0DDE6F9411E}" dt="2026-04-21T07:59:04.397" v="1557" actId="5793"/>
           <ac:spMkLst>
             <pc:docMk/>
             <pc:sldMk cId="880069333" sldId="263"/>
@@ -903,14 +910,14 @@
           </ac:spMkLst>
         </pc:spChg>
       </pc:sldChg>
-      <pc:sldChg chg="modSp mod">
-        <pc:chgData name="安珠 山田" userId="6e1c022d408fe718" providerId="LiveId" clId="{AB092387-110A-496A-ABD5-B0DDE6F9411E}" dt="2026-04-20T14:20:31.271" v="1277" actId="20577"/>
+      <pc:sldChg chg="addSp delSp modSp mod">
+        <pc:chgData name="安珠 山田" userId="6e1c022d408fe718" providerId="LiveId" clId="{AB092387-110A-496A-ABD5-B0DDE6F9411E}" dt="2026-04-21T08:29:31.658" v="1724" actId="113"/>
         <pc:sldMkLst>
           <pc:docMk/>
           <pc:sldMk cId="2962889850" sldId="265"/>
         </pc:sldMkLst>
         <pc:spChg chg="mod">
-          <ac:chgData name="安珠 山田" userId="6e1c022d408fe718" providerId="LiveId" clId="{AB092387-110A-496A-ABD5-B0DDE6F9411E}" dt="2026-04-20T11:51:38.137" v="670" actId="1076"/>
+          <ac:chgData name="安珠 山田" userId="6e1c022d408fe718" providerId="LiveId" clId="{AB092387-110A-496A-ABD5-B0DDE6F9411E}" dt="2026-04-21T08:23:07.149" v="1653" actId="20577"/>
           <ac:spMkLst>
             <pc:docMk/>
             <pc:sldMk cId="2962889850" sldId="265"/>
@@ -918,30 +925,46 @@
           </ac:spMkLst>
         </pc:spChg>
         <pc:spChg chg="mod">
-          <ac:chgData name="安珠 山田" userId="6e1c022d408fe718" providerId="LiveId" clId="{AB092387-110A-496A-ABD5-B0DDE6F9411E}" dt="2026-04-20T14:20:31.271" v="1277" actId="20577"/>
+          <ac:chgData name="安珠 山田" userId="6e1c022d408fe718" providerId="LiveId" clId="{AB092387-110A-496A-ABD5-B0DDE6F9411E}" dt="2026-04-21T08:29:31.658" v="1724" actId="113"/>
           <ac:spMkLst>
             <pc:docMk/>
             <pc:sldMk cId="2962889850" sldId="265"/>
             <ac:spMk id="3" creationId="{B3C16688-C1D1-5287-E699-912532A1771C}"/>
           </ac:spMkLst>
         </pc:spChg>
-        <pc:picChg chg="mod">
-          <ac:chgData name="安珠 山田" userId="6e1c022d408fe718" providerId="LiveId" clId="{AB092387-110A-496A-ABD5-B0DDE6F9411E}" dt="2026-04-20T11:51:00.655" v="652" actId="1076"/>
+        <pc:spChg chg="add del mod">
+          <ac:chgData name="安珠 山田" userId="6e1c022d408fe718" providerId="LiveId" clId="{AB092387-110A-496A-ABD5-B0DDE6F9411E}" dt="2026-04-21T08:22:38.156" v="1632" actId="478"/>
+          <ac:spMkLst>
+            <pc:docMk/>
+            <pc:sldMk cId="2962889850" sldId="265"/>
+            <ac:spMk id="8" creationId="{237B70B1-49B4-6E71-5ACA-3631B41611B8}"/>
+          </ac:spMkLst>
+        </pc:spChg>
+        <pc:picChg chg="del mod">
+          <ac:chgData name="安珠 山田" userId="6e1c022d408fe718" providerId="LiveId" clId="{AB092387-110A-496A-ABD5-B0DDE6F9411E}" dt="2026-04-21T08:20:16.857" v="1606" actId="478"/>
           <ac:picMkLst>
             <pc:docMk/>
             <pc:sldMk cId="2962889850" sldId="265"/>
             <ac:picMk id="5" creationId="{A91B83D9-7A49-B800-082C-58EDB09EF9BC}"/>
           </ac:picMkLst>
         </pc:picChg>
+        <pc:picChg chg="add mod">
+          <ac:chgData name="安珠 山田" userId="6e1c022d408fe718" providerId="LiveId" clId="{AB092387-110A-496A-ABD5-B0DDE6F9411E}" dt="2026-04-21T08:22:41.962" v="1633" actId="14100"/>
+          <ac:picMkLst>
+            <pc:docMk/>
+            <pc:sldMk cId="2962889850" sldId="265"/>
+            <ac:picMk id="6" creationId="{F6BDA72F-A5D4-DC32-99A9-56E86C6EDD32}"/>
+          </ac:picMkLst>
+        </pc:picChg>
       </pc:sldChg>
-      <pc:sldChg chg="modSp mod">
-        <pc:chgData name="安珠 山田" userId="6e1c022d408fe718" providerId="LiveId" clId="{AB092387-110A-496A-ABD5-B0DDE6F9411E}" dt="2026-04-20T12:46:07.506" v="1012" actId="113"/>
+      <pc:sldChg chg="addSp delSp modSp mod">
+        <pc:chgData name="安珠 山田" userId="6e1c022d408fe718" providerId="LiveId" clId="{AB092387-110A-496A-ABD5-B0DDE6F9411E}" dt="2026-04-21T08:34:09.211" v="1774"/>
         <pc:sldMkLst>
           <pc:docMk/>
           <pc:sldMk cId="1084252157" sldId="266"/>
         </pc:sldMkLst>
         <pc:spChg chg="mod">
-          <ac:chgData name="安珠 山田" userId="6e1c022d408fe718" providerId="LiveId" clId="{AB092387-110A-496A-ABD5-B0DDE6F9411E}" dt="2026-04-20T12:46:07.506" v="1012" actId="113"/>
+          <ac:chgData name="安珠 山田" userId="6e1c022d408fe718" providerId="LiveId" clId="{AB092387-110A-496A-ABD5-B0DDE6F9411E}" dt="2026-04-21T08:34:09.211" v="1774"/>
           <ac:spMkLst>
             <pc:docMk/>
             <pc:sldMk cId="1084252157" sldId="266"/>
@@ -949,24 +972,32 @@
           </ac:spMkLst>
         </pc:spChg>
         <pc:spChg chg="mod">
-          <ac:chgData name="安珠 山田" userId="6e1c022d408fe718" providerId="LiveId" clId="{AB092387-110A-496A-ABD5-B0DDE6F9411E}" dt="2026-04-20T11:51:29.736" v="668" actId="14100"/>
+          <ac:chgData name="安珠 山田" userId="6e1c022d408fe718" providerId="LiveId" clId="{AB092387-110A-496A-ABD5-B0DDE6F9411E}" dt="2026-04-21T08:29:24.312" v="1723" actId="20577"/>
           <ac:spMkLst>
             <pc:docMk/>
             <pc:sldMk cId="1084252157" sldId="266"/>
             <ac:spMk id="3" creationId="{E427D0B0-C1D7-2C1E-2CB0-65EB6236FF24}"/>
           </ac:spMkLst>
         </pc:spChg>
-        <pc:picChg chg="mod">
-          <ac:chgData name="安珠 山田" userId="6e1c022d408fe718" providerId="LiveId" clId="{AB092387-110A-496A-ABD5-B0DDE6F9411E}" dt="2026-04-20T11:51:32.175" v="669" actId="1076"/>
+        <pc:picChg chg="add del mod">
+          <ac:chgData name="安珠 山田" userId="6e1c022d408fe718" providerId="LiveId" clId="{AB092387-110A-496A-ABD5-B0DDE6F9411E}" dt="2026-04-21T08:23:58.580" v="1677" actId="478"/>
           <ac:picMkLst>
             <pc:docMk/>
             <pc:sldMk cId="1084252157" sldId="266"/>
             <ac:picMk id="5" creationId="{8BEA9564-9CC8-B90E-CF4A-E9079BE35658}"/>
           </ac:picMkLst>
         </pc:picChg>
+        <pc:picChg chg="add del mod">
+          <ac:chgData name="安珠 山田" userId="6e1c022d408fe718" providerId="LiveId" clId="{AB092387-110A-496A-ABD5-B0DDE6F9411E}" dt="2026-04-21T08:27:02.529" v="1690" actId="1076"/>
+          <ac:picMkLst>
+            <pc:docMk/>
+            <pc:sldMk cId="1084252157" sldId="266"/>
+            <ac:picMk id="6" creationId="{F97BA380-F7AD-AD7A-4803-62A53CD5F329}"/>
+          </ac:picMkLst>
+        </pc:picChg>
       </pc:sldChg>
-      <pc:sldChg chg="addSp modSp mod">
-        <pc:chgData name="安珠 山田" userId="6e1c022d408fe718" providerId="LiveId" clId="{AB092387-110A-496A-ABD5-B0DDE6F9411E}" dt="2026-04-20T14:30:32.818" v="1323" actId="1076"/>
+      <pc:sldChg chg="addSp delSp modSp mod">
+        <pc:chgData name="安珠 山田" userId="6e1c022d408fe718" providerId="LiveId" clId="{AB092387-110A-496A-ABD5-B0DDE6F9411E}" dt="2026-04-21T08:32:05.816" v="1769" actId="1076"/>
         <pc:sldMkLst>
           <pc:docMk/>
           <pc:sldMk cId="2415093881" sldId="267"/>
@@ -987,12 +1018,20 @@
             <ac:spMk id="3" creationId="{65ED1E3F-DFFB-71CD-6E65-2941EF4B8D45}"/>
           </ac:spMkLst>
         </pc:spChg>
-        <pc:picChg chg="add mod">
-          <ac:chgData name="安珠 山田" userId="6e1c022d408fe718" providerId="LiveId" clId="{AB092387-110A-496A-ABD5-B0DDE6F9411E}" dt="2026-04-20T14:30:32.818" v="1323" actId="1076"/>
+        <pc:picChg chg="add del mod">
+          <ac:chgData name="安珠 山田" userId="6e1c022d408fe718" providerId="LiveId" clId="{AB092387-110A-496A-ABD5-B0DDE6F9411E}" dt="2026-04-21T08:31:43.579" v="1766" actId="478"/>
           <ac:picMkLst>
             <pc:docMk/>
             <pc:sldMk cId="2415093881" sldId="267"/>
             <ac:picMk id="4" creationId="{AF5B749E-D5B4-B7D2-B85C-131709B1A52E}"/>
+          </ac:picMkLst>
+        </pc:picChg>
+        <pc:picChg chg="add mod">
+          <ac:chgData name="安珠 山田" userId="6e1c022d408fe718" providerId="LiveId" clId="{AB092387-110A-496A-ABD5-B0DDE6F9411E}" dt="2026-04-21T08:32:05.816" v="1769" actId="1076"/>
+          <ac:picMkLst>
+            <pc:docMk/>
+            <pc:sldMk cId="2415093881" sldId="267"/>
+            <ac:picMk id="6" creationId="{546F6B95-F0C8-E281-9084-E27B7F983A0B}"/>
           </ac:picMkLst>
         </pc:picChg>
       </pc:sldChg>
@@ -1019,8 +1058,8 @@
           </ac:picMkLst>
         </pc:picChg>
       </pc:sldChg>
-      <pc:sldChg chg="addSp delSp modSp mod">
-        <pc:chgData name="安珠 山田" userId="6e1c022d408fe718" providerId="LiveId" clId="{AB092387-110A-496A-ABD5-B0DDE6F9411E}" dt="2026-04-20T14:30:53.367" v="1328" actId="1076"/>
+      <pc:sldChg chg="addSp delSp modSp del mod">
+        <pc:chgData name="安珠 山田" userId="6e1c022d408fe718" providerId="LiveId" clId="{AB092387-110A-496A-ABD5-B0DDE6F9411E}" dt="2026-04-21T08:40:39.426" v="1777" actId="47"/>
         <pc:sldMkLst>
           <pc:docMk/>
           <pc:sldMk cId="53960310" sldId="269"/>
@@ -1033,6 +1072,14 @@
             <ac:spMk id="2" creationId="{7450D0E3-B0F8-5FDF-1E20-BC9C00CD8173}"/>
           </ac:spMkLst>
         </pc:spChg>
+        <pc:spChg chg="add del mod">
+          <ac:chgData name="安珠 山田" userId="6e1c022d408fe718" providerId="LiveId" clId="{AB092387-110A-496A-ABD5-B0DDE6F9411E}" dt="2026-04-21T08:32:18.620" v="1771" actId="931"/>
+          <ac:spMkLst>
+            <pc:docMk/>
+            <pc:sldMk cId="53960310" sldId="269"/>
+            <ac:spMk id="4" creationId="{7BA16316-5AE7-CF9B-81F9-B0844BDBD936}"/>
+          </ac:spMkLst>
+        </pc:spChg>
         <pc:spChg chg="add">
           <ac:chgData name="安珠 山田" userId="6e1c022d408fe718" providerId="LiveId" clId="{AB092387-110A-496A-ABD5-B0DDE6F9411E}" dt="2026-04-20T12:07:14.198" v="733"/>
           <ac:spMkLst>
@@ -1089,12 +1136,20 @@
             <ac:spMk id="12" creationId="{DDB026EA-1AE9-E926-F893-8858F49FF097}"/>
           </ac:spMkLst>
         </pc:spChg>
-        <pc:picChg chg="mod">
-          <ac:chgData name="安珠 山田" userId="6e1c022d408fe718" providerId="LiveId" clId="{AB092387-110A-496A-ABD5-B0DDE6F9411E}" dt="2026-04-20T14:30:53.367" v="1328" actId="1076"/>
+        <pc:picChg chg="del mod">
+          <ac:chgData name="安珠 山田" userId="6e1c022d408fe718" providerId="LiveId" clId="{AB092387-110A-496A-ABD5-B0DDE6F9411E}" dt="2026-04-21T08:32:08.321" v="1770" actId="478"/>
           <ac:picMkLst>
             <pc:docMk/>
             <pc:sldMk cId="53960310" sldId="269"/>
             <ac:picMk id="5" creationId="{89D0A24F-53B0-40C0-0BB5-1F89B78B709C}"/>
+          </ac:picMkLst>
+        </pc:picChg>
+        <pc:picChg chg="add mod ord">
+          <ac:chgData name="安珠 山田" userId="6e1c022d408fe718" providerId="LiveId" clId="{AB092387-110A-496A-ABD5-B0DDE6F9411E}" dt="2026-04-21T08:32:22.808" v="1773" actId="1076"/>
+          <ac:picMkLst>
+            <pc:docMk/>
+            <pc:sldMk cId="53960310" sldId="269"/>
+            <ac:picMk id="7" creationId="{00E48DE4-2FF0-7099-58A7-B368C8E2EADD}"/>
           </ac:picMkLst>
         </pc:picChg>
       </pc:sldChg>
@@ -1130,25 +1185,41 @@
         </pc:picChg>
       </pc:sldChg>
       <pc:sldChg chg="addSp delSp modSp new mod">
-        <pc:chgData name="安珠 山田" userId="6e1c022d408fe718" providerId="LiveId" clId="{AB092387-110A-496A-ABD5-B0DDE6F9411E}" dt="2026-04-20T14:42:51.031" v="1537" actId="1076"/>
+        <pc:chgData name="安珠 山田" userId="6e1c022d408fe718" providerId="LiveId" clId="{AB092387-110A-496A-ABD5-B0DDE6F9411E}" dt="2026-04-21T09:17:11.069" v="1887" actId="20577"/>
         <pc:sldMkLst>
           <pc:docMk/>
           <pc:sldMk cId="3078148418" sldId="271"/>
         </pc:sldMkLst>
         <pc:spChg chg="mod">
-          <ac:chgData name="安珠 山田" userId="6e1c022d408fe718" providerId="LiveId" clId="{AB092387-110A-496A-ABD5-B0DDE6F9411E}" dt="2026-04-20T12:34:07.865" v="941" actId="1076"/>
+          <ac:chgData name="安珠 山田" userId="6e1c022d408fe718" providerId="LiveId" clId="{AB092387-110A-496A-ABD5-B0DDE6F9411E}" dt="2026-04-21T09:15:11.511" v="1833" actId="20577"/>
           <ac:spMkLst>
             <pc:docMk/>
             <pc:sldMk cId="3078148418" sldId="271"/>
             <ac:spMk id="2" creationId="{C8D6DC7B-B233-0011-275C-E9928511F359}"/>
           </ac:spMkLst>
         </pc:spChg>
-        <pc:spChg chg="mod">
-          <ac:chgData name="安珠 山田" userId="6e1c022d408fe718" providerId="LiveId" clId="{AB092387-110A-496A-ABD5-B0DDE6F9411E}" dt="2026-04-20T14:38:19.095" v="1474" actId="1076"/>
+        <pc:spChg chg="del mod">
+          <ac:chgData name="安珠 山田" userId="6e1c022d408fe718" providerId="LiveId" clId="{AB092387-110A-496A-ABD5-B0DDE6F9411E}" dt="2026-04-21T09:14:07.622" v="1816"/>
           <ac:spMkLst>
             <pc:docMk/>
             <pc:sldMk cId="3078148418" sldId="271"/>
             <ac:spMk id="3" creationId="{328ABC56-0357-BAC7-DCE3-0E5550B5696E}"/>
+          </ac:spMkLst>
+        </pc:spChg>
+        <pc:spChg chg="add">
+          <ac:chgData name="安珠 山田" userId="6e1c022d408fe718" providerId="LiveId" clId="{AB092387-110A-496A-ABD5-B0DDE6F9411E}" dt="2026-04-21T09:14:04.061" v="1811"/>
+          <ac:spMkLst>
+            <pc:docMk/>
+            <pc:sldMk cId="3078148418" sldId="271"/>
+            <ac:spMk id="4" creationId="{891BE87B-7E1D-84FB-EB7B-3E0CCB2D7E67}"/>
+          </ac:spMkLst>
+        </pc:spChg>
+        <pc:spChg chg="add mod">
+          <ac:chgData name="安珠 山田" userId="6e1c022d408fe718" providerId="LiveId" clId="{AB092387-110A-496A-ABD5-B0DDE6F9411E}" dt="2026-04-21T09:17:11.069" v="1887" actId="20577"/>
+          <ac:spMkLst>
+            <pc:docMk/>
+            <pc:sldMk cId="3078148418" sldId="271"/>
+            <ac:spMk id="6" creationId="{68E087B9-F538-2608-57B3-BB3EFABAE064}"/>
           </ac:spMkLst>
         </pc:spChg>
         <pc:picChg chg="add del mod">
@@ -1168,14 +1239,14 @@
           </ac:picMkLst>
         </pc:picChg>
       </pc:sldChg>
-      <pc:sldChg chg="addSp modSp new mod">
-        <pc:chgData name="安珠 山田" userId="6e1c022d408fe718" providerId="LiveId" clId="{AB092387-110A-496A-ABD5-B0DDE6F9411E}" dt="2026-04-20T14:19:45.407" v="1276" actId="255"/>
+      <pc:sldChg chg="addSp modSp new mod ord">
+        <pc:chgData name="安珠 山田" userId="6e1c022d408fe718" providerId="LiveId" clId="{AB092387-110A-496A-ABD5-B0DDE6F9411E}" dt="2026-04-21T08:19:53.290" v="1605" actId="20577"/>
         <pc:sldMkLst>
           <pc:docMk/>
           <pc:sldMk cId="1468670142" sldId="272"/>
         </pc:sldMkLst>
         <pc:spChg chg="mod">
-          <ac:chgData name="安珠 山田" userId="6e1c022d408fe718" providerId="LiveId" clId="{AB092387-110A-496A-ABD5-B0DDE6F9411E}" dt="2026-04-20T14:19:40.259" v="1275" actId="113"/>
+          <ac:chgData name="安珠 山田" userId="6e1c022d408fe718" providerId="LiveId" clId="{AB092387-110A-496A-ABD5-B0DDE6F9411E}" dt="2026-04-21T08:19:53.290" v="1605" actId="20577"/>
           <ac:spMkLst>
             <pc:docMk/>
             <pc:sldMk cId="1468670142" sldId="272"/>
@@ -1183,7 +1254,7 @@
           </ac:spMkLst>
         </pc:spChg>
         <pc:spChg chg="mod">
-          <ac:chgData name="安珠 山田" userId="6e1c022d408fe718" providerId="LiveId" clId="{AB092387-110A-496A-ABD5-B0DDE6F9411E}" dt="2026-04-20T14:19:45.407" v="1276" actId="255"/>
+          <ac:chgData name="安珠 山田" userId="6e1c022d408fe718" providerId="LiveId" clId="{AB092387-110A-496A-ABD5-B0DDE6F9411E}" dt="2026-04-21T08:19:30.273" v="1599" actId="1076"/>
           <ac:spMkLst>
             <pc:docMk/>
             <pc:sldMk cId="1468670142" sldId="272"/>
@@ -1208,7 +1279,7 @@
         </pc:picChg>
       </pc:sldChg>
       <pc:sldChg chg="addSp delSp modSp new mod">
-        <pc:chgData name="安珠 山田" userId="6e1c022d408fe718" providerId="LiveId" clId="{AB092387-110A-496A-ABD5-B0DDE6F9411E}" dt="2026-04-20T14:28:03.486" v="1306" actId="20577"/>
+        <pc:chgData name="安珠 山田" userId="6e1c022d408fe718" providerId="LiveId" clId="{AB092387-110A-496A-ABD5-B0DDE6F9411E}" dt="2026-04-21T08:29:36.049" v="1725" actId="20577"/>
         <pc:sldMkLst>
           <pc:docMk/>
           <pc:sldMk cId="1003321230" sldId="273"/>
@@ -1229,20 +1300,36 @@
             <ac:spMk id="3" creationId="{382EA9E9-C17D-6512-CB54-1CAFFF2FFEA5}"/>
           </ac:spMkLst>
         </pc:spChg>
+        <pc:spChg chg="add del mod">
+          <ac:chgData name="安珠 山田" userId="6e1c022d408fe718" providerId="LiveId" clId="{AB092387-110A-496A-ABD5-B0DDE6F9411E}" dt="2026-04-21T08:28:03.123" v="1704" actId="931"/>
+          <ac:spMkLst>
+            <pc:docMk/>
+            <pc:sldMk cId="1003321230" sldId="273"/>
+            <ac:spMk id="4" creationId="{BA1E0A70-CD08-A1A5-54E5-B36D38A5AB67}"/>
+          </ac:spMkLst>
+        </pc:spChg>
         <pc:spChg chg="add mod">
-          <ac:chgData name="安珠 山田" userId="6e1c022d408fe718" providerId="LiveId" clId="{AB092387-110A-496A-ABD5-B0DDE6F9411E}" dt="2026-04-20T14:28:03.486" v="1306" actId="20577"/>
+          <ac:chgData name="安珠 山田" userId="6e1c022d408fe718" providerId="LiveId" clId="{AB092387-110A-496A-ABD5-B0DDE6F9411E}" dt="2026-04-21T08:29:36.049" v="1725" actId="20577"/>
           <ac:spMkLst>
             <pc:docMk/>
             <pc:sldMk cId="1003321230" sldId="273"/>
             <ac:spMk id="6" creationId="{A2A1D3DA-05BA-9487-9F3B-BEC06E171B7D}"/>
           </ac:spMkLst>
         </pc:spChg>
-        <pc:picChg chg="add mod ord">
-          <ac:chgData name="安珠 山田" userId="6e1c022d408fe718" providerId="LiveId" clId="{AB092387-110A-496A-ABD5-B0DDE6F9411E}" dt="2026-04-20T14:26:05.256" v="1288" actId="1076"/>
+        <pc:picChg chg="add del mod ord">
+          <ac:chgData name="安珠 山田" userId="6e1c022d408fe718" providerId="LiveId" clId="{AB092387-110A-496A-ABD5-B0DDE6F9411E}" dt="2026-04-21T08:27:55.008" v="1703" actId="478"/>
           <ac:picMkLst>
             <pc:docMk/>
             <pc:sldMk cId="1003321230" sldId="273"/>
             <ac:picMk id="5" creationId="{20ECFB10-E262-FE24-3E61-5555CE5EDB1B}"/>
+          </ac:picMkLst>
+        </pc:picChg>
+        <pc:picChg chg="add mod ord">
+          <ac:chgData name="安珠 山田" userId="6e1c022d408fe718" providerId="LiveId" clId="{AB092387-110A-496A-ABD5-B0DDE6F9411E}" dt="2026-04-21T08:29:09.449" v="1715" actId="1076"/>
+          <ac:picMkLst>
+            <pc:docMk/>
+            <pc:sldMk cId="1003321230" sldId="273"/>
+            <ac:picMk id="8" creationId="{1FD1D100-3092-FE96-6F0B-13FBF99E3F80}"/>
           </ac:picMkLst>
         </pc:picChg>
       </pc:sldChg>
@@ -1565,13 +1652,13 @@
         </pc:picChg>
       </pc:sldChg>
       <pc:sldChg chg="addSp delSp modSp new mod setBg addAnim">
-        <pc:chgData name="安珠 山田" userId="6e1c022d408fe718" providerId="LiveId" clId="{AB092387-110A-496A-ABD5-B0DDE6F9411E}" dt="2026-04-20T14:50:43.760" v="1545" actId="1076"/>
+        <pc:chgData name="安珠 山田" userId="6e1c022d408fe718" providerId="LiveId" clId="{AB092387-110A-496A-ABD5-B0DDE6F9411E}" dt="2026-04-21T08:27:48.873" v="1701" actId="1076"/>
         <pc:sldMkLst>
           <pc:docMk/>
           <pc:sldMk cId="607202413" sldId="276"/>
         </pc:sldMkLst>
         <pc:spChg chg="mod">
-          <ac:chgData name="安珠 山田" userId="6e1c022d408fe718" providerId="LiveId" clId="{AB092387-110A-496A-ABD5-B0DDE6F9411E}" dt="2026-04-20T14:50:43.760" v="1545" actId="1076"/>
+          <ac:chgData name="安珠 山田" userId="6e1c022d408fe718" providerId="LiveId" clId="{AB092387-110A-496A-ABD5-B0DDE6F9411E}" dt="2026-04-21T08:27:48.873" v="1701" actId="1076"/>
           <ac:spMkLst>
             <pc:docMk/>
             <pc:sldMk cId="607202413" sldId="276"/>
@@ -1897,7 +1984,7 @@
         </pc:spChg>
       </pc:sldChg>
       <pc:sldChg chg="addSp delSp modSp new mod setBg modAnim">
-        <pc:chgData name="安珠 山田" userId="6e1c022d408fe718" providerId="LiveId" clId="{AB092387-110A-496A-ABD5-B0DDE6F9411E}" dt="2026-04-20T14:50:47.048" v="1546" actId="1076"/>
+        <pc:chgData name="安珠 山田" userId="6e1c022d408fe718" providerId="LiveId" clId="{AB092387-110A-496A-ABD5-B0DDE6F9411E}" dt="2026-04-21T08:27:52.042" v="1702" actId="1076"/>
         <pc:sldMkLst>
           <pc:docMk/>
           <pc:sldMk cId="917191811" sldId="278"/>
@@ -1919,7 +2006,7 @@
           </ac:spMkLst>
         </pc:spChg>
         <pc:spChg chg="add mod">
-          <ac:chgData name="安珠 山田" userId="6e1c022d408fe718" providerId="LiveId" clId="{AB092387-110A-496A-ABD5-B0DDE6F9411E}" dt="2026-04-20T14:50:47.048" v="1546" actId="1076"/>
+          <ac:chgData name="安珠 山田" userId="6e1c022d408fe718" providerId="LiveId" clId="{AB092387-110A-496A-ABD5-B0DDE6F9411E}" dt="2026-04-21T08:27:52.042" v="1702" actId="1076"/>
           <ac:spMkLst>
             <pc:docMk/>
             <pc:sldMk cId="917191811" sldId="278"/>
@@ -1992,13 +2079,13 @@
         </pc:spChg>
       </pc:sldChg>
       <pc:sldChg chg="addSp delSp modSp new mod setBg addAnim">
-        <pc:chgData name="安珠 山田" userId="6e1c022d408fe718" providerId="LiveId" clId="{AB092387-110A-496A-ABD5-B0DDE6F9411E}" dt="2026-04-20T14:50:50.585" v="1547" actId="1076"/>
+        <pc:chgData name="安珠 山田" userId="6e1c022d408fe718" providerId="LiveId" clId="{AB092387-110A-496A-ABD5-B0DDE6F9411E}" dt="2026-04-21T08:27:44.026" v="1700" actId="1076"/>
         <pc:sldMkLst>
           <pc:docMk/>
           <pc:sldMk cId="3417285733" sldId="279"/>
         </pc:sldMkLst>
         <pc:spChg chg="mod">
-          <ac:chgData name="安珠 山田" userId="6e1c022d408fe718" providerId="LiveId" clId="{AB092387-110A-496A-ABD5-B0DDE6F9411E}" dt="2026-04-20T14:50:50.585" v="1547" actId="1076"/>
+          <ac:chgData name="安珠 山田" userId="6e1c022d408fe718" providerId="LiveId" clId="{AB092387-110A-496A-ABD5-B0DDE6F9411E}" dt="2026-04-21T08:27:44.026" v="1700" actId="1076"/>
           <ac:spMkLst>
             <pc:docMk/>
             <pc:sldMk cId="3417285733" sldId="279"/>
@@ -5243,7 +5330,7 @@
           <a:p>
             <a:fld id="{F689366E-B9D4-45ED-84E3-196E52D443BF}" type="datetimeFigureOut">
               <a:rPr lang="en-US" smtClean="0"/>
-              <a:t>4/20/2026</a:t>
+              <a:t>4/21/2026</a:t>
             </a:fld>
             <a:endParaRPr lang="en-US"/>
           </a:p>
@@ -5846,7 +5933,7 @@
           <a:p>
             <a:fld id="{8E5B7A4A-1B97-4E82-9A34-BBE6CA298B67}" type="datetimeFigureOut">
               <a:rPr lang="en-US" smtClean="0"/>
-              <a:t>4/20/2026</a:t>
+              <a:t>4/21/2026</a:t>
             </a:fld>
             <a:endParaRPr lang="en-US"/>
           </a:p>
@@ -6044,7 +6131,7 @@
           <a:p>
             <a:fld id="{8E5B7A4A-1B97-4E82-9A34-BBE6CA298B67}" type="datetimeFigureOut">
               <a:rPr lang="en-US" smtClean="0"/>
-              <a:t>4/20/2026</a:t>
+              <a:t>4/21/2026</a:t>
             </a:fld>
             <a:endParaRPr lang="en-US"/>
           </a:p>
@@ -6252,7 +6339,7 @@
           <a:p>
             <a:fld id="{8E5B7A4A-1B97-4E82-9A34-BBE6CA298B67}" type="datetimeFigureOut">
               <a:rPr lang="en-US" smtClean="0"/>
-              <a:t>4/20/2026</a:t>
+              <a:t>4/21/2026</a:t>
             </a:fld>
             <a:endParaRPr lang="en-US"/>
           </a:p>
@@ -6450,7 +6537,7 @@
           <a:p>
             <a:fld id="{8E5B7A4A-1B97-4E82-9A34-BBE6CA298B67}" type="datetimeFigureOut">
               <a:rPr lang="en-US" smtClean="0"/>
-              <a:t>4/20/2026</a:t>
+              <a:t>4/21/2026</a:t>
             </a:fld>
             <a:endParaRPr lang="en-US"/>
           </a:p>
@@ -6725,7 +6812,7 @@
           <a:p>
             <a:fld id="{8E5B7A4A-1B97-4E82-9A34-BBE6CA298B67}" type="datetimeFigureOut">
               <a:rPr lang="en-US" smtClean="0"/>
-              <a:t>4/20/2026</a:t>
+              <a:t>4/21/2026</a:t>
             </a:fld>
             <a:endParaRPr lang="en-US"/>
           </a:p>
@@ -6990,7 +7077,7 @@
           <a:p>
             <a:fld id="{8E5B7A4A-1B97-4E82-9A34-BBE6CA298B67}" type="datetimeFigureOut">
               <a:rPr lang="en-US" smtClean="0"/>
-              <a:t>4/20/2026</a:t>
+              <a:t>4/21/2026</a:t>
             </a:fld>
             <a:endParaRPr lang="en-US"/>
           </a:p>
@@ -7402,7 +7489,7 @@
           <a:p>
             <a:fld id="{8E5B7A4A-1B97-4E82-9A34-BBE6CA298B67}" type="datetimeFigureOut">
               <a:rPr lang="en-US" smtClean="0"/>
-              <a:t>4/20/2026</a:t>
+              <a:t>4/21/2026</a:t>
             </a:fld>
             <a:endParaRPr lang="en-US"/>
           </a:p>
@@ -7543,7 +7630,7 @@
           <a:p>
             <a:fld id="{8E5B7A4A-1B97-4E82-9A34-BBE6CA298B67}" type="datetimeFigureOut">
               <a:rPr lang="en-US" smtClean="0"/>
-              <a:t>4/20/2026</a:t>
+              <a:t>4/21/2026</a:t>
             </a:fld>
             <a:endParaRPr lang="en-US"/>
           </a:p>
@@ -7656,7 +7743,7 @@
           <a:p>
             <a:fld id="{8E5B7A4A-1B97-4E82-9A34-BBE6CA298B67}" type="datetimeFigureOut">
               <a:rPr lang="en-US" smtClean="0"/>
-              <a:t>4/20/2026</a:t>
+              <a:t>4/21/2026</a:t>
             </a:fld>
             <a:endParaRPr lang="en-US"/>
           </a:p>
@@ -7967,7 +8054,7 @@
           <a:p>
             <a:fld id="{8E5B7A4A-1B97-4E82-9A34-BBE6CA298B67}" type="datetimeFigureOut">
               <a:rPr lang="en-US" smtClean="0"/>
-              <a:t>4/20/2026</a:t>
+              <a:t>4/21/2026</a:t>
             </a:fld>
             <a:endParaRPr lang="en-US"/>
           </a:p>
@@ -8255,7 +8342,7 @@
           <a:p>
             <a:fld id="{8E5B7A4A-1B97-4E82-9A34-BBE6CA298B67}" type="datetimeFigureOut">
               <a:rPr lang="en-US" smtClean="0"/>
-              <a:t>4/20/2026</a:t>
+              <a:t>4/21/2026</a:t>
             </a:fld>
             <a:endParaRPr lang="en-US"/>
           </a:p>
@@ -8496,7 +8583,7 @@
           <a:p>
             <a:fld id="{8E5B7A4A-1B97-4E82-9A34-BBE6CA298B67}" type="datetimeFigureOut">
               <a:rPr lang="en-US" smtClean="0"/>
-              <a:t>4/20/2026</a:t>
+              <a:t>4/21/2026</a:t>
             </a:fld>
             <a:endParaRPr lang="en-US"/>
           </a:p>
@@ -11761,7 +11848,7 @@
         </p:nvSpPr>
         <p:spPr>
           <a:xfrm>
-            <a:off x="921192" y="1103718"/>
+            <a:off x="1259022" y="1428550"/>
             <a:ext cx="10349614" cy="3268520"/>
           </a:xfrm>
         </p:spPr>
@@ -11771,7 +11858,7 @@
           </a:bodyPr>
           <a:lstStyle/>
           <a:p>
-            <a:pPr algn="r"/>
+            <a:pPr algn="ctr"/>
             <a:r>
               <a:rPr lang="en-US" sz="4800" kern="1200" dirty="0">
                 <a:solidFill>
@@ -11784,9 +11871,24 @@
               <a:t>3. Structural Instability at the Page Level</a:t>
             </a:r>
             <a:br>
+              <a:rPr lang="en-US" sz="4800" dirty="0">
+                <a:solidFill>
+                  <a:srgbClr val="FFFFFF"/>
+                </a:solidFill>
+              </a:rPr>
+            </a:br>
+            <a:r>
+              <a:rPr lang="en-US" sz="4800" dirty="0">
+                <a:solidFill>
+                  <a:schemeClr val="bg1"/>
+                </a:solidFill>
+              </a:rPr>
+              <a:t>(H1, RQ1 &amp; RQ2)</a:t>
+            </a:r>
+            <a:br>
               <a:rPr lang="en-US" sz="4800" b="1" kern="1200" dirty="0">
                 <a:solidFill>
-                  <a:srgbClr val="FFFFFF"/>
+                  <a:schemeClr val="bg1"/>
                 </a:solidFill>
                 <a:latin typeface="+mj-lt"/>
                 <a:ea typeface="+mj-ea"/>
@@ -11795,7 +11897,7 @@
             </a:br>
             <a:endParaRPr lang="en-US" sz="4800" kern="1200" dirty="0">
               <a:solidFill>
-                <a:srgbClr val="FFFFFF"/>
+                <a:schemeClr val="bg1"/>
               </a:solidFill>
               <a:latin typeface="+mj-lt"/>
               <a:ea typeface="+mj-ea"/>
@@ -12129,26 +12231,47 @@
         </p:nvSpPr>
         <p:spPr>
           <a:xfrm>
-            <a:off x="838200" y="1825625"/>
-            <a:ext cx="3196905" cy="4351338"/>
+            <a:off x="655301" y="1325563"/>
+            <a:ext cx="4360817" cy="5114557"/>
           </a:xfrm>
         </p:spPr>
         <p:txBody>
-          <a:bodyPr/>
+          <a:bodyPr>
+            <a:normAutofit/>
+          </a:bodyPr>
           <a:lstStyle/>
           <a:p>
             <a:r>
               <a:rPr lang="en-US" dirty="0"/>
-              <a:t>Diversity pages: </a:t>
+              <a:t> Diversity-related pages show higher structural instability</a:t>
             </a:r>
-          </a:p>
-          <a:p>
-            <a:pPr marL="457200" lvl="1" indent="0">
+            <a:br>
+              <a:rPr lang="en-US" dirty="0"/>
+            </a:br>
+            <a:r>
+              <a:rPr lang="en-US" dirty="0"/>
+              <a:t>This </a:t>
+            </a:r>
+            <a:r>
+              <a:rPr lang="en-US" b="1" dirty="0"/>
+              <a:t>supports H1</a:t>
+            </a:r>
+          </a:p>
+          <a:p>
+            <a:pPr marL="0" indent="0">
               <a:buNone/>
             </a:pPr>
             <a:r>
               <a:rPr lang="en-US" dirty="0"/>
-              <a:t>Higher edit burst (0.58 vs 0.44) </a:t>
+              <a:t>→ Evidence for </a:t>
+            </a:r>
+            <a:r>
+              <a:rPr lang="en-US" b="1" dirty="0"/>
+              <a:t>RQ1</a:t>
+            </a:r>
+            <a:r>
+              <a:rPr lang="en-US" dirty="0"/>
+              <a:t>: diversity pages are more unstable</a:t>
             </a:r>
           </a:p>
           <a:p>
@@ -12156,12 +12279,16 @@
               <a:buNone/>
             </a:pPr>
             <a:r>
-              <a:rPr lang="ja-JP" altLang="en-US" dirty="0"/>
-              <a:t>✔ </a:t>
+              <a:rPr lang="en-US" dirty="0"/>
+              <a:t>→ Suggests for </a:t>
+            </a:r>
+            <a:r>
+              <a:rPr lang="en-US" b="1" dirty="0"/>
+              <a:t>RQ2</a:t>
             </a:r>
             <a:r>
               <a:rPr lang="en-US" dirty="0"/>
-              <a:t>H1 supported </a:t>
+              <a:t>: instability is driven by temporal concentration</a:t>
             </a:r>
           </a:p>
           <a:p>
@@ -12171,10 +12298,10 @@
       </p:sp>
       <p:pic>
         <p:nvPicPr>
-          <p:cNvPr id="5" name="Picture 4">
+          <p:cNvPr id="6" name="Picture 5">
             <a:extLst>
               <a:ext uri="{FF2B5EF4-FFF2-40B4-BE49-F238E27FC236}">
-                <a16:creationId xmlns:a16="http://schemas.microsoft.com/office/drawing/2014/main" id="{A91B83D9-7A49-B800-082C-58EDB09EF9BC}"/>
+                <a16:creationId xmlns:a16="http://schemas.microsoft.com/office/drawing/2014/main" id="{F6BDA72F-A5D4-DC32-99A9-56E86C6EDD32}"/>
               </a:ext>
             </a:extLst>
           </p:cNvPr>
@@ -12197,8 +12324,8 @@
         </p:blipFill>
         <p:spPr>
           <a:xfrm>
-            <a:off x="3932633" y="1027906"/>
-            <a:ext cx="7562841" cy="5293988"/>
+            <a:off x="5016118" y="966612"/>
+            <a:ext cx="7306511" cy="5114557"/>
           </a:xfrm>
           <a:prstGeom prst="rect">
             <a:avLst/>
@@ -12639,7 +12766,7 @@
         </p:nvSpPr>
         <p:spPr>
           <a:xfrm>
-            <a:off x="1122705" y="1428550"/>
+            <a:off x="1303031" y="1358882"/>
             <a:ext cx="9585935" cy="3268520"/>
           </a:xfrm>
         </p:spPr>
@@ -12649,7 +12776,7 @@
           </a:bodyPr>
           <a:lstStyle/>
           <a:p>
-            <a:pPr algn="r"/>
+            <a:pPr algn="ctr"/>
             <a:r>
               <a:rPr lang="en-US" kern="1200" dirty="0">
                 <a:solidFill>
@@ -12671,6 +12798,14 @@
                 <a:cs typeface="+mj-cs"/>
               </a:rPr>
             </a:br>
+            <a:r>
+              <a:rPr lang="en-US" dirty="0">
+                <a:solidFill>
+                  <a:schemeClr val="bg1"/>
+                </a:solidFill>
+              </a:rPr>
+              <a:t>(H2, RQ1 &amp; RQ2)</a:t>
+            </a:r>
             <a:br>
               <a:rPr lang="en-US" kern="1200" dirty="0">
                 <a:solidFill>
@@ -12994,7 +13129,7 @@
           <a:p>
             <a:r>
               <a:rPr lang="en-US" dirty="0"/>
-              <a:t>Burst-related instability</a:t>
+              <a:t>Temporal instability</a:t>
             </a:r>
           </a:p>
         </p:txBody>
@@ -13017,40 +13152,68 @@
         </p:nvSpPr>
         <p:spPr>
           <a:xfrm>
-            <a:off x="838200" y="1825625"/>
-            <a:ext cx="2534174" cy="4351338"/>
+            <a:off x="470263" y="1236617"/>
+            <a:ext cx="3840479" cy="4940346"/>
           </a:xfrm>
         </p:spPr>
         <p:txBody>
-          <a:bodyPr/>
+          <a:bodyPr>
+            <a:normAutofit/>
+          </a:bodyPr>
           <a:lstStyle/>
           <a:p>
             <a:r>
               <a:rPr lang="en-US" dirty="0"/>
-              <a:t>Burst days: </a:t>
+              <a:t> Diversity-related pages show lower burst-day rates</a:t>
             </a:r>
-          </a:p>
-          <a:p>
-            <a:pPr lvl="1"/>
+            <a:br>
+              <a:rPr lang="en-US" dirty="0"/>
+            </a:br>
             <a:r>
               <a:rPr lang="en-US" dirty="0"/>
-              <a:t>LOWER in diversity pages </a:t>
+              <a:t>(0.8% vs 1.7%)</a:t>
             </a:r>
           </a:p>
           <a:p>
+            <a:pPr marL="0" indent="0">
+              <a:buNone/>
+            </a:pPr>
+            <a:r>
+              <a:rPr lang="en-US" b="1" dirty="0"/>
+              <a:t>   H2 not supported</a:t>
+            </a:r>
+            <a:endParaRPr lang="en-US" dirty="0"/>
+          </a:p>
+          <a:p>
+            <a:pPr marL="0" indent="0">
+              <a:buNone/>
+            </a:pPr>
             <a:r>
               <a:rPr lang="en-US" dirty="0"/>
-              <a:t>(0.019 vs 0.031) </a:t>
+              <a:t>→ </a:t>
             </a:r>
-          </a:p>
-          <a:p>
             <a:r>
-              <a:rPr lang="ja-JP" altLang="en-US" dirty="0"/>
-              <a:t>✖ </a:t>
+              <a:rPr lang="en-US" b="1" dirty="0"/>
+              <a:t>RQ1</a:t>
             </a:r>
             <a:r>
               <a:rPr lang="en-US" dirty="0"/>
-              <a:t>H2 not supported</a:t>
+              <a:t>: No (not more unstable in this dimension)</a:t>
+            </a:r>
+            <a:br>
+              <a:rPr lang="en-US" dirty="0"/>
+            </a:br>
+            <a:r>
+              <a:rPr lang="en-US" dirty="0"/>
+              <a:t>→ </a:t>
+            </a:r>
+            <a:r>
+              <a:rPr lang="en-US" b="1" dirty="0"/>
+              <a:t>RQ2</a:t>
+            </a:r>
+            <a:r>
+              <a:rPr lang="en-US" dirty="0"/>
+              <a:t>: instability is not driven by frequent bursts</a:t>
             </a:r>
           </a:p>
           <a:p>
@@ -13060,10 +13223,10 @@
       </p:sp>
       <p:pic>
         <p:nvPicPr>
-          <p:cNvPr id="5" name="Picture 4">
+          <p:cNvPr id="6" name="Picture 5">
             <a:extLst>
               <a:ext uri="{FF2B5EF4-FFF2-40B4-BE49-F238E27FC236}">
-                <a16:creationId xmlns:a16="http://schemas.microsoft.com/office/drawing/2014/main" id="{8BEA9564-9CC8-B90E-CF4A-E9079BE35658}"/>
+                <a16:creationId xmlns:a16="http://schemas.microsoft.com/office/drawing/2014/main" id="{F97BA380-F7AD-AD7A-4803-62A53CD5F329}"/>
               </a:ext>
             </a:extLst>
           </p:cNvPr>
@@ -13086,8 +13249,8 @@
         </p:blipFill>
         <p:spPr>
           <a:xfrm>
-            <a:off x="3807522" y="1027906"/>
-            <a:ext cx="8049936" cy="5634955"/>
+            <a:off x="4868084" y="1083313"/>
+            <a:ext cx="7463254" cy="5224278"/>
           </a:xfrm>
           <a:prstGeom prst="rect">
             <a:avLst/>
@@ -13528,7 +13691,7 @@
         </p:nvSpPr>
         <p:spPr>
           <a:xfrm>
-            <a:off x="449205" y="1286344"/>
+            <a:off x="1607445" y="1573727"/>
             <a:ext cx="9199855" cy="3268520"/>
           </a:xfrm>
         </p:spPr>
@@ -13538,7 +13701,7 @@
           </a:bodyPr>
           <a:lstStyle/>
           <a:p>
-            <a:pPr algn="r"/>
+            <a:pPr algn="ctr"/>
             <a:r>
               <a:rPr lang="en-US" sz="4800" kern="1200" dirty="0">
                 <a:solidFill>
@@ -13549,6 +13712,24 @@
                 <a:cs typeface="+mj-cs"/>
               </a:rPr>
               <a:t>5. Revert-related Instability</a:t>
+            </a:r>
+            <a:br>
+              <a:rPr lang="en-US" sz="4800" kern="1200" dirty="0">
+                <a:solidFill>
+                  <a:srgbClr val="FFFFFF"/>
+                </a:solidFill>
+                <a:latin typeface="+mj-lt"/>
+                <a:ea typeface="+mj-ea"/>
+                <a:cs typeface="+mj-cs"/>
+              </a:rPr>
+            </a:br>
+            <a:r>
+              <a:rPr lang="en-US" sz="4800" dirty="0">
+                <a:solidFill>
+                  <a:schemeClr val="bg1"/>
+                </a:solidFill>
+              </a:rPr>
+              <a:t>(H3, RQ1 &amp; RQ2)</a:t>
             </a:r>
             <a:br>
               <a:rPr lang="en-US" sz="4800" kern="1200" dirty="0">
@@ -13873,44 +14054,6 @@
           </a:p>
         </p:txBody>
       </p:sp>
-      <p:pic>
-        <p:nvPicPr>
-          <p:cNvPr id="5" name="Content Placeholder 4">
-            <a:extLst>
-              <a:ext uri="{FF2B5EF4-FFF2-40B4-BE49-F238E27FC236}">
-                <a16:creationId xmlns:a16="http://schemas.microsoft.com/office/drawing/2014/main" id="{20ECFB10-E262-FE24-3E61-5555CE5EDB1B}"/>
-              </a:ext>
-            </a:extLst>
-          </p:cNvPr>
-          <p:cNvPicPr>
-            <a:picLocks noGrp="1" noChangeAspect="1"/>
-          </p:cNvPicPr>
-          <p:nvPr>
-            <p:ph idx="1"/>
-          </p:nvPr>
-        </p:nvPicPr>
-        <p:blipFill>
-          <a:blip r:embed="rId2">
-            <a:extLst>
-              <a:ext uri="{28A0092B-C50C-407E-A947-70E740481C1C}">
-                <a14:useLocalDpi xmlns:a14="http://schemas.microsoft.com/office/drawing/2010/main" val="0"/>
-              </a:ext>
-            </a:extLst>
-          </a:blip>
-          <a:stretch>
-            <a:fillRect/>
-          </a:stretch>
-        </p:blipFill>
-        <p:spPr>
-          <a:xfrm>
-            <a:off x="4471261" y="1561465"/>
-            <a:ext cx="6216197" cy="4351338"/>
-          </a:xfrm>
-          <a:prstGeom prst="rect">
-            <a:avLst/>
-          </a:prstGeom>
-        </p:spPr>
-      </p:pic>
       <p:sp>
         <p:nvSpPr>
           <p:cNvPr id="6" name="Content Placeholder 2">
@@ -13927,8 +14070,8 @@
         </p:nvSpPr>
         <p:spPr>
           <a:xfrm>
-            <a:off x="838200" y="1825625"/>
-            <a:ext cx="2534174" cy="4351338"/>
+            <a:off x="777239" y="1820091"/>
+            <a:ext cx="3751217" cy="4861969"/>
           </a:xfrm>
           <a:prstGeom prst="rect">
             <a:avLst/>
@@ -14103,13 +14246,61 @@
             </a:lvl9pPr>
           </a:lstStyle>
           <a:p>
+            <a:pPr marL="0" indent="0">
+              <a:buNone/>
+            </a:pPr>
             <a:r>
-              <a:rPr lang="ja-JP" altLang="en-US" dirty="0"/>
-              <a:t>✖ </a:t>
+              <a:rPr lang="en-US" dirty="0"/>
+              <a:t>• No difference in revert-related instability</a:t>
+            </a:r>
+            <a:br>
+              <a:rPr lang="en-US" dirty="0"/>
+            </a:br>
+            <a:r>
+              <a:rPr lang="en-US" dirty="0"/>
+              <a:t>(17.2% vs 17.9%)</a:t>
+            </a:r>
+          </a:p>
+          <a:p>
+            <a:pPr marL="0" indent="0">
+              <a:buNone/>
+            </a:pPr>
+            <a:r>
+              <a:rPr lang="en-US" b="1" dirty="0"/>
+              <a:t>H3 not supported</a:t>
+            </a:r>
+            <a:endParaRPr lang="en-US" dirty="0"/>
+          </a:p>
+          <a:p>
+            <a:pPr marL="0" indent="0">
+              <a:buNone/>
+            </a:pPr>
+            <a:r>
+              <a:rPr lang="en-US" dirty="0"/>
+              <a:t>→ </a:t>
+            </a:r>
+            <a:r>
+              <a:rPr lang="en-US" b="1" dirty="0"/>
+              <a:t>RQ1</a:t>
             </a:r>
             <a:r>
               <a:rPr lang="en-US" dirty="0"/>
-              <a:t>H3 not supported</a:t>
+              <a:t>: No difference in this dimension</a:t>
+            </a:r>
+            <a:br>
+              <a:rPr lang="en-US" dirty="0"/>
+            </a:br>
+            <a:r>
+              <a:rPr lang="en-US" dirty="0"/>
+              <a:t>→ </a:t>
+            </a:r>
+            <a:r>
+              <a:rPr lang="en-US" b="1" dirty="0"/>
+              <a:t>RQ2</a:t>
+            </a:r>
+            <a:r>
+              <a:rPr lang="en-US" dirty="0"/>
+              <a:t>: instability is not driven by conflict</a:t>
             </a:r>
           </a:p>
           <a:p>
@@ -14117,6 +14308,44 @@
           </a:p>
         </p:txBody>
       </p:sp>
+      <p:pic>
+        <p:nvPicPr>
+          <p:cNvPr id="8" name="Content Placeholder 7">
+            <a:extLst>
+              <a:ext uri="{FF2B5EF4-FFF2-40B4-BE49-F238E27FC236}">
+                <a16:creationId xmlns:a16="http://schemas.microsoft.com/office/drawing/2014/main" id="{1FD1D100-3092-FE96-6F0B-13FBF99E3F80}"/>
+              </a:ext>
+            </a:extLst>
+          </p:cNvPr>
+          <p:cNvPicPr>
+            <a:picLocks noGrp="1" noChangeAspect="1"/>
+          </p:cNvPicPr>
+          <p:nvPr>
+            <p:ph idx="1"/>
+          </p:nvPr>
+        </p:nvPicPr>
+        <p:blipFill>
+          <a:blip r:embed="rId2">
+            <a:extLst>
+              <a:ext uri="{28A0092B-C50C-407E-A947-70E740481C1C}">
+                <a14:useLocalDpi xmlns:a14="http://schemas.microsoft.com/office/drawing/2010/main" val="0"/>
+              </a:ext>
+            </a:extLst>
+          </a:blip>
+          <a:stretch>
+            <a:fillRect/>
+          </a:stretch>
+        </p:blipFill>
+        <p:spPr>
+          <a:xfrm>
+            <a:off x="5008290" y="1357372"/>
+            <a:ext cx="7183710" cy="5028597"/>
+          </a:xfrm>
+          <a:prstGeom prst="rect">
+            <a:avLst/>
+          </a:prstGeom>
+        </p:spPr>
+      </p:pic>
     </p:spTree>
     <p:extLst>
       <p:ext uri="{BB962C8B-B14F-4D97-AF65-F5344CB8AC3E}">
@@ -14896,125 +15125,8 @@
           <a:p>
             <a:r>
               <a:rPr lang="en-US" dirty="0"/>
-              <a:t>Mitigation Design and Evaluation</a:t>
+              <a:t>Mitigation Strategies</a:t>
             </a:r>
-          </a:p>
-        </p:txBody>
-      </p:sp>
-      <p:sp>
-        <p:nvSpPr>
-          <p:cNvPr id="3" name="Content Placeholder 2">
-            <a:extLst>
-              <a:ext uri="{FF2B5EF4-FFF2-40B4-BE49-F238E27FC236}">
-                <a16:creationId xmlns:a16="http://schemas.microsoft.com/office/drawing/2014/main" id="{328ABC56-0357-BAC7-DCE3-0E5550B5696E}"/>
-              </a:ext>
-            </a:extLst>
-          </p:cNvPr>
-          <p:cNvSpPr>
-            <a:spLocks noGrp="1"/>
-          </p:cNvSpPr>
-          <p:nvPr>
-            <p:ph idx="1"/>
-          </p:nvPr>
-        </p:nvSpPr>
-        <p:spPr>
-          <a:xfrm>
-            <a:off x="521037" y="1396818"/>
-            <a:ext cx="10515600" cy="5062501"/>
-          </a:xfrm>
-        </p:spPr>
-        <p:txBody>
-          <a:bodyPr>
-            <a:noAutofit/>
-          </a:bodyPr>
-          <a:lstStyle/>
-          <a:p>
-            <a:r>
-              <a:rPr lang="en-US" b="1" dirty="0"/>
-              <a:t>Revert-focused</a:t>
-            </a:r>
-            <a:endParaRPr lang="en-US" dirty="0"/>
-          </a:p>
-          <a:p>
-            <a:pPr marL="0" indent="0">
-              <a:buNone/>
-            </a:pPr>
-            <a:r>
-              <a:rPr lang="en-US" dirty="0"/>
-              <a:t>1) Revert filtered  2) Revert weighted</a:t>
-            </a:r>
-          </a:p>
-          <a:p>
-            <a:r>
-              <a:rPr lang="en-US" b="1" dirty="0"/>
-              <a:t>Burst-focused</a:t>
-            </a:r>
-            <a:endParaRPr lang="en-US" dirty="0"/>
-          </a:p>
-          <a:p>
-            <a:pPr marL="0" indent="0">
-              <a:buNone/>
-            </a:pPr>
-            <a:r>
-              <a:rPr lang="en-US" dirty="0"/>
-              <a:t>3)Burst weighted  4) Event-day trimmed</a:t>
-            </a:r>
-          </a:p>
-          <a:p>
-            <a:r>
-              <a:rPr lang="en-US" b="1" dirty="0"/>
-              <a:t>Combined burst mitigation</a:t>
-            </a:r>
-            <a:endParaRPr lang="en-US" dirty="0"/>
-          </a:p>
-          <a:p>
-            <a:pPr marL="0" indent="0">
-              <a:buNone/>
-            </a:pPr>
-            <a:r>
-              <a:rPr lang="en-US" dirty="0"/>
-              <a:t>  5) Trim burst days, then </a:t>
-            </a:r>
-            <a:r>
-              <a:rPr lang="en-US" dirty="0" err="1"/>
-              <a:t>downweight</a:t>
-            </a:r>
-            <a:r>
-              <a:rPr lang="en-US" dirty="0"/>
-              <a:t> remaining bursty pages</a:t>
-            </a:r>
-          </a:p>
-          <a:p>
-            <a:pPr marL="0" indent="0">
-              <a:buNone/>
-            </a:pPr>
-            <a:br>
-              <a:rPr lang="en-US" dirty="0"/>
-            </a:br>
-            <a:r>
-              <a:rPr lang="en-US" dirty="0"/>
-              <a:t>Then,</a:t>
-            </a:r>
-            <a:r>
-              <a:rPr lang="en-US" b="1" dirty="0"/>
-              <a:t> </a:t>
-            </a:r>
-            <a:r>
-              <a:rPr lang="en-US" dirty="0"/>
-              <a:t>evaluate them on 2 outcome dimensions</a:t>
-            </a:r>
-          </a:p>
-          <a:p>
-            <a:r>
-              <a:rPr lang="en-US" dirty="0"/>
-              <a:t>Burst-related instability (mean edit burst) and revert-related instability (mean reverted-edit share)</a:t>
-            </a:r>
-          </a:p>
-          <a:p>
-            <a:pPr marL="0" indent="0">
-              <a:buNone/>
-            </a:pPr>
-            <a:endParaRPr lang="en-US" sz="2400" dirty="0"/>
           </a:p>
         </p:txBody>
       </p:sp>
@@ -15056,6 +15168,384 @@
           </a:effectLst>
         </p:spPr>
       </p:pic>
+      <p:sp>
+        <p:nvSpPr>
+          <p:cNvPr id="6" name="Rectangle 2">
+            <a:extLst>
+              <a:ext uri="{FF2B5EF4-FFF2-40B4-BE49-F238E27FC236}">
+                <a16:creationId xmlns:a16="http://schemas.microsoft.com/office/drawing/2014/main" id="{68E087B9-F538-2608-57B3-BB3EFABAE064}"/>
+              </a:ext>
+            </a:extLst>
+          </p:cNvPr>
+          <p:cNvSpPr>
+            <a:spLocks noGrp="1" noChangeArrowheads="1"/>
+          </p:cNvSpPr>
+          <p:nvPr>
+            <p:ph idx="1"/>
+          </p:nvPr>
+        </p:nvSpPr>
+        <p:spPr bwMode="auto">
+          <a:xfrm>
+            <a:off x="577378" y="1396818"/>
+            <a:ext cx="11836763" cy="4874155"/>
+          </a:xfrm>
+          <a:prstGeom prst="rect">
+            <a:avLst/>
+          </a:prstGeom>
+          <a:noFill/>
+          <a:ln>
+            <a:noFill/>
+          </a:ln>
+          <a:effectLst/>
+          <a:extLst>
+            <a:ext uri="{909E8E84-426E-40DD-AFC4-6F175D3DCCD1}">
+              <a14:hiddenFill xmlns:a14="http://schemas.microsoft.com/office/drawing/2010/main">
+                <a:solidFill>
+                  <a:schemeClr val="accent1"/>
+                </a:solidFill>
+              </a14:hiddenFill>
+            </a:ext>
+            <a:ext uri="{91240B29-F687-4F45-9708-019B960494DF}">
+              <a14:hiddenLine xmlns:a14="http://schemas.microsoft.com/office/drawing/2010/main" w="9525">
+                <a:solidFill>
+                  <a:schemeClr val="tx1"/>
+                </a:solidFill>
+                <a:miter lim="800000"/>
+                <a:headEnd/>
+                <a:tailEnd/>
+              </a14:hiddenLine>
+            </a:ext>
+            <a:ext uri="{AF507438-7753-43E0-B8FC-AC1667EBCBE1}">
+              <a14:hiddenEffects xmlns:a14="http://schemas.microsoft.com/office/drawing/2010/main">
+                <a:effectLst>
+                  <a:outerShdw dist="35921" dir="2700000" algn="ctr" rotWithShape="0">
+                    <a:schemeClr val="bg2"/>
+                  </a:outerShdw>
+                </a:effectLst>
+              </a14:hiddenEffects>
+            </a:ext>
+          </a:extLst>
+        </p:spPr>
+        <p:txBody>
+          <a:bodyPr vert="horz" wrap="square" lIns="91440" tIns="45720" rIns="91440" bIns="45720" numCol="1" anchor="ctr" anchorCtr="0" compatLnSpc="1">
+            <a:prstTxWarp prst="textNoShape">
+              <a:avLst/>
+            </a:prstTxWarp>
+            <a:spAutoFit/>
+          </a:bodyPr>
+          <a:lstStyle/>
+          <a:p>
+            <a:pPr marL="0" lvl="0" indent="0" eaLnBrk="0" fontAlgn="base" hangingPunct="0">
+              <a:lnSpc>
+                <a:spcPct val="100000"/>
+              </a:lnSpc>
+              <a:spcBef>
+                <a:spcPct val="0"/>
+              </a:spcBef>
+              <a:spcAft>
+                <a:spcPct val="0"/>
+              </a:spcAft>
+              <a:buNone/>
+            </a:pPr>
+            <a:r>
+              <a:rPr lang="en-US" dirty="0"/>
+              <a:t>Use three strategies</a:t>
+            </a:r>
+            <a:endParaRPr kumimoji="0" lang="en-US" altLang="en-US" b="1" i="0" u="none" strike="noStrike" cap="none" normalizeH="0" baseline="0" dirty="0">
+              <a:ln>
+                <a:noFill/>
+              </a:ln>
+              <a:solidFill>
+                <a:schemeClr val="tx1"/>
+              </a:solidFill>
+              <a:effectLst/>
+              <a:latin typeface="Arial" panose="020B0604020202020204" pitchFamily="34" charset="0"/>
+            </a:endParaRPr>
+          </a:p>
+          <a:p>
+            <a:pPr marL="457200" lvl="1" indent="0" eaLnBrk="0" fontAlgn="base" hangingPunct="0">
+              <a:lnSpc>
+                <a:spcPct val="100000"/>
+              </a:lnSpc>
+              <a:spcBef>
+                <a:spcPct val="0"/>
+              </a:spcBef>
+              <a:spcAft>
+                <a:spcPct val="0"/>
+              </a:spcAft>
+              <a:buNone/>
+            </a:pPr>
+            <a:r>
+              <a:rPr kumimoji="0" lang="en-US" altLang="en-US" sz="2800" i="0" u="none" strike="noStrike" cap="none" normalizeH="0" baseline="0" dirty="0">
+                <a:ln>
+                  <a:noFill/>
+                </a:ln>
+                <a:solidFill>
+                  <a:schemeClr val="tx1"/>
+                </a:solidFill>
+                <a:effectLst/>
+                <a:latin typeface="Arial" panose="020B0604020202020204" pitchFamily="34" charset="0"/>
+              </a:rPr>
+              <a:t>1) Burst weighted</a:t>
+            </a:r>
+            <a:br>
+              <a:rPr kumimoji="0" lang="en-US" altLang="en-US" sz="2800" i="0" u="none" strike="noStrike" cap="none" normalizeH="0" baseline="0" dirty="0">
+                <a:ln>
+                  <a:noFill/>
+                </a:ln>
+                <a:solidFill>
+                  <a:schemeClr val="tx1"/>
+                </a:solidFill>
+                <a:effectLst/>
+                <a:latin typeface="Arial" panose="020B0604020202020204" pitchFamily="34" charset="0"/>
+              </a:rPr>
+            </a:br>
+            <a:r>
+              <a:rPr kumimoji="0" lang="en-US" altLang="en-US" sz="2800" i="0" u="none" strike="noStrike" cap="none" normalizeH="0" baseline="0" dirty="0">
+                <a:ln>
+                  <a:noFill/>
+                </a:ln>
+                <a:solidFill>
+                  <a:schemeClr val="tx1"/>
+                </a:solidFill>
+                <a:effectLst/>
+                <a:latin typeface="Arial" panose="020B0604020202020204" pitchFamily="34" charset="0"/>
+              </a:rPr>
+              <a:t>     → weight = 1 / (1 + </a:t>
+            </a:r>
+            <a:r>
+              <a:rPr kumimoji="0" lang="en-US" altLang="en-US" sz="2800" i="0" u="none" strike="noStrike" cap="none" normalizeH="0" baseline="0" dirty="0" err="1">
+                <a:ln>
+                  <a:noFill/>
+                </a:ln>
+                <a:solidFill>
+                  <a:schemeClr val="tx1"/>
+                </a:solidFill>
+                <a:effectLst/>
+                <a:latin typeface="Arial" panose="020B0604020202020204" pitchFamily="34" charset="0"/>
+              </a:rPr>
+              <a:t>edit_burst</a:t>
+            </a:r>
+            <a:r>
+              <a:rPr kumimoji="0" lang="en-US" altLang="en-US" sz="2800" i="0" u="none" strike="noStrike" cap="none" normalizeH="0" baseline="0" dirty="0">
+                <a:ln>
+                  <a:noFill/>
+                </a:ln>
+                <a:solidFill>
+                  <a:schemeClr val="tx1"/>
+                </a:solidFill>
+                <a:effectLst/>
+                <a:latin typeface="Arial" panose="020B0604020202020204" pitchFamily="34" charset="0"/>
+              </a:rPr>
+              <a:t>)</a:t>
+            </a:r>
+            <a:br>
+              <a:rPr kumimoji="0" lang="en-US" altLang="en-US" sz="2800" i="0" u="none" strike="noStrike" cap="none" normalizeH="0" baseline="0" dirty="0">
+                <a:ln>
+                  <a:noFill/>
+                </a:ln>
+                <a:solidFill>
+                  <a:schemeClr val="tx1"/>
+                </a:solidFill>
+                <a:effectLst/>
+                <a:latin typeface="Arial" panose="020B0604020202020204" pitchFamily="34" charset="0"/>
+              </a:rPr>
+            </a:br>
+            <a:r>
+              <a:rPr kumimoji="0" lang="en-US" altLang="en-US" sz="2800" i="0" u="none" strike="noStrike" cap="none" normalizeH="0" baseline="0" dirty="0">
+                <a:ln>
+                  <a:noFill/>
+                </a:ln>
+                <a:solidFill>
+                  <a:schemeClr val="tx1"/>
+                </a:solidFill>
+                <a:effectLst/>
+                <a:latin typeface="Arial" panose="020B0604020202020204" pitchFamily="34" charset="0"/>
+              </a:rPr>
+              <a:t>     → high-burst pages have less influence on averages </a:t>
+            </a:r>
+          </a:p>
+          <a:p>
+            <a:pPr marL="457200" lvl="1" indent="0" eaLnBrk="0" fontAlgn="base" hangingPunct="0">
+              <a:lnSpc>
+                <a:spcPct val="100000"/>
+              </a:lnSpc>
+              <a:spcBef>
+                <a:spcPct val="0"/>
+              </a:spcBef>
+              <a:spcAft>
+                <a:spcPct val="0"/>
+              </a:spcAft>
+              <a:buNone/>
+            </a:pPr>
+            <a:r>
+              <a:rPr kumimoji="0" lang="en-US" altLang="en-US" sz="2800" i="0" u="none" strike="noStrike" cap="none" normalizeH="0" baseline="0" dirty="0">
+                <a:ln>
+                  <a:noFill/>
+                </a:ln>
+                <a:solidFill>
+                  <a:schemeClr val="tx1"/>
+                </a:solidFill>
+                <a:effectLst/>
+                <a:latin typeface="Arial" panose="020B0604020202020204" pitchFamily="34" charset="0"/>
+              </a:rPr>
+              <a:t>2) Event-day trimmed</a:t>
+            </a:r>
+            <a:br>
+              <a:rPr kumimoji="0" lang="en-US" altLang="en-US" sz="2800" i="0" u="none" strike="noStrike" cap="none" normalizeH="0" baseline="0" dirty="0">
+                <a:ln>
+                  <a:noFill/>
+                </a:ln>
+                <a:solidFill>
+                  <a:schemeClr val="tx1"/>
+                </a:solidFill>
+                <a:effectLst/>
+                <a:latin typeface="Arial" panose="020B0604020202020204" pitchFamily="34" charset="0"/>
+              </a:rPr>
+            </a:br>
+            <a:r>
+              <a:rPr kumimoji="0" lang="en-US" altLang="en-US" sz="2800" i="0" u="none" strike="noStrike" cap="none" normalizeH="0" baseline="0" dirty="0">
+                <a:ln>
+                  <a:noFill/>
+                </a:ln>
+                <a:solidFill>
+                  <a:schemeClr val="tx1"/>
+                </a:solidFill>
+                <a:effectLst/>
+                <a:latin typeface="Arial" panose="020B0604020202020204" pitchFamily="34" charset="0"/>
+              </a:rPr>
+              <a:t>	→ remove burst days</a:t>
+            </a:r>
+            <a:br>
+              <a:rPr kumimoji="0" lang="en-US" altLang="en-US" sz="2800" i="0" u="none" strike="noStrike" cap="none" normalizeH="0" baseline="0" dirty="0">
+                <a:ln>
+                  <a:noFill/>
+                </a:ln>
+                <a:solidFill>
+                  <a:schemeClr val="tx1"/>
+                </a:solidFill>
+                <a:effectLst/>
+                <a:latin typeface="Arial" panose="020B0604020202020204" pitchFamily="34" charset="0"/>
+              </a:rPr>
+            </a:br>
+            <a:r>
+              <a:rPr kumimoji="0" lang="en-US" altLang="en-US" sz="2800" i="0" u="none" strike="noStrike" cap="none" normalizeH="0" baseline="0" dirty="0">
+                <a:ln>
+                  <a:noFill/>
+                </a:ln>
+                <a:solidFill>
+                  <a:schemeClr val="tx1"/>
+                </a:solidFill>
+                <a:effectLst/>
+                <a:latin typeface="Arial" panose="020B0604020202020204" pitchFamily="34" charset="0"/>
+              </a:rPr>
+              <a:t>	→ recompute page-level metrics </a:t>
+            </a:r>
+          </a:p>
+          <a:p>
+            <a:pPr marL="457200" lvl="1" indent="0" eaLnBrk="0" fontAlgn="base" hangingPunct="0">
+              <a:lnSpc>
+                <a:spcPct val="100000"/>
+              </a:lnSpc>
+              <a:spcBef>
+                <a:spcPct val="0"/>
+              </a:spcBef>
+              <a:spcAft>
+                <a:spcPct val="0"/>
+              </a:spcAft>
+              <a:buNone/>
+            </a:pPr>
+            <a:r>
+              <a:rPr kumimoji="0" lang="en-US" altLang="en-US" sz="2800" i="0" u="none" strike="noStrike" cap="none" normalizeH="0" baseline="0" dirty="0">
+                <a:ln>
+                  <a:noFill/>
+                </a:ln>
+                <a:solidFill>
+                  <a:schemeClr val="tx1"/>
+                </a:solidFill>
+                <a:effectLst/>
+                <a:latin typeface="Arial" panose="020B0604020202020204" pitchFamily="34" charset="0"/>
+              </a:rPr>
+              <a:t>3) Combined</a:t>
+            </a:r>
+            <a:br>
+              <a:rPr kumimoji="0" lang="en-US" altLang="en-US" sz="2800" b="0" i="0" u="none" strike="noStrike" cap="none" normalizeH="0" baseline="0">
+                <a:ln>
+                  <a:noFill/>
+                </a:ln>
+                <a:solidFill>
+                  <a:schemeClr val="tx1"/>
+                </a:solidFill>
+                <a:effectLst/>
+                <a:latin typeface="Arial" panose="020B0604020202020204" pitchFamily="34" charset="0"/>
+              </a:rPr>
+            </a:br>
+            <a:r>
+              <a:rPr kumimoji="0" lang="en-US" altLang="en-US" sz="2800" b="0" i="0" u="none" strike="noStrike" cap="none" normalizeH="0" baseline="0">
+                <a:ln>
+                  <a:noFill/>
+                </a:ln>
+                <a:solidFill>
+                  <a:schemeClr val="tx1"/>
+                </a:solidFill>
+                <a:effectLst/>
+                <a:latin typeface="Arial" panose="020B0604020202020204" pitchFamily="34" charset="0"/>
+              </a:rPr>
+              <a:t>	→ </a:t>
+            </a:r>
+            <a:r>
+              <a:rPr kumimoji="0" lang="en-US" altLang="en-US" sz="2800" b="0" i="0" u="none" strike="noStrike" cap="none" normalizeH="0" baseline="0" dirty="0">
+                <a:ln>
+                  <a:noFill/>
+                </a:ln>
+                <a:solidFill>
+                  <a:schemeClr val="tx1"/>
+                </a:solidFill>
+                <a:effectLst/>
+                <a:latin typeface="Arial" panose="020B0604020202020204" pitchFamily="34" charset="0"/>
+              </a:rPr>
+              <a:t>trim burst days + apply burst weighting</a:t>
+            </a:r>
+          </a:p>
+          <a:p>
+            <a:pPr marL="0" indent="0">
+              <a:buNone/>
+            </a:pPr>
+            <a:r>
+              <a:rPr lang="en-US" dirty="0"/>
+              <a:t>Then, evaluate their effects on </a:t>
+            </a:r>
+            <a:r>
+              <a:rPr lang="en-US" b="1" dirty="0"/>
+              <a:t>structural instability</a:t>
+            </a:r>
+            <a:r>
+              <a:rPr lang="en-US" dirty="0"/>
+              <a:t>, </a:t>
+            </a:r>
+            <a:br>
+              <a:rPr lang="en-US" dirty="0"/>
+            </a:br>
+            <a:r>
+              <a:rPr lang="en-US" dirty="0"/>
+              <a:t>the main dimension along which diversity-related pages differ.</a:t>
+            </a:r>
+            <a:r>
+              <a:rPr kumimoji="0" lang="en-US" altLang="en-US" b="0" i="0" u="none" strike="noStrike" cap="none" normalizeH="0" baseline="0" dirty="0">
+                <a:ln>
+                  <a:noFill/>
+                </a:ln>
+                <a:solidFill>
+                  <a:schemeClr val="tx1"/>
+                </a:solidFill>
+                <a:effectLst/>
+                <a:latin typeface="Arial" panose="020B0604020202020204" pitchFamily="34" charset="0"/>
+              </a:rPr>
+              <a:t> </a:t>
+            </a:r>
+          </a:p>
+        </p:txBody>
+      </p:sp>
     </p:spTree>
     <p:extLst>
       <p:ext uri="{BB962C8B-B14F-4D97-AF65-F5344CB8AC3E}">
@@ -15218,10 +15708,10 @@
       </p:sp>
       <p:pic>
         <p:nvPicPr>
-          <p:cNvPr id="4" name="Content Placeholder 4">
+          <p:cNvPr id="6" name="Picture 5">
             <a:extLst>
               <a:ext uri="{FF2B5EF4-FFF2-40B4-BE49-F238E27FC236}">
-                <a16:creationId xmlns:a16="http://schemas.microsoft.com/office/drawing/2014/main" id="{AF5B749E-D5B4-B7D2-B85C-131709B1A52E}"/>
+                <a16:creationId xmlns:a16="http://schemas.microsoft.com/office/drawing/2014/main" id="{546F6B95-F0C8-E281-9084-E27B7F983A0B}"/>
               </a:ext>
             </a:extLst>
           </p:cNvPr>
@@ -15244,8 +15734,8 @@
         </p:blipFill>
         <p:spPr>
           <a:xfrm>
-            <a:off x="5602444" y="1208991"/>
-            <a:ext cx="6589556" cy="4612689"/>
+            <a:off x="5709920" y="1584961"/>
+            <a:ext cx="6148882" cy="4304217"/>
           </a:xfrm>
           <a:prstGeom prst="rect">
             <a:avLst/>
@@ -15268,6 +15758,14 @@
 <file path=ppt/slides/slide19.xml><?xml version="1.0" encoding="utf-8"?>
 <p:sld xmlns:a="http://schemas.openxmlformats.org/drawingml/2006/main" xmlns:r="http://schemas.openxmlformats.org/officeDocument/2006/relationships" xmlns:p="http://schemas.openxmlformats.org/presentationml/2006/main">
   <p:cSld>
+    <p:bg>
+      <p:bgPr>
+        <a:solidFill>
+          <a:schemeClr val="bg1"/>
+        </a:solidFill>
+        <a:effectLst/>
+      </p:bgPr>
+    </p:bg>
     <p:spTree>
       <p:nvGrpSpPr>
         <p:cNvPr id="1" name=""/>
@@ -15282,12 +15780,390 @@
           <a:chExt cx="0" cy="0"/>
         </a:xfrm>
       </p:grpSpPr>
+      <p:sp useBgFill="1">
+        <p:nvSpPr>
+          <p:cNvPr id="7" name="Rectangle 6">
+            <a:extLst>
+              <a:ext uri="{FF2B5EF4-FFF2-40B4-BE49-F238E27FC236}">
+                <a16:creationId xmlns:a16="http://schemas.microsoft.com/office/drawing/2014/main" id="{0E30439A-8A5B-46EC-8283-9B6B031D40D0}"/>
+              </a:ext>
+              <a:ext uri="{C183D7F6-B498-43B3-948B-1728B52AA6E4}">
+                <adec:decorative xmlns:adec="http://schemas.microsoft.com/office/drawing/2017/decorative" val="1"/>
+              </a:ext>
+            </a:extLst>
+          </p:cNvPr>
+          <p:cNvSpPr>
+            <a:spLocks noGrp="1" noRot="1" noChangeAspect="1" noMove="1" noResize="1" noEditPoints="1" noAdjustHandles="1" noChangeArrowheads="1" noChangeShapeType="1" noTextEdit="1"/>
+          </p:cNvSpPr>
+          <p:nvPr>
+            <p:extLst>
+              <p:ext uri="{386F3935-93C4-4BCD-93E2-E3B085C9AB24}">
+                <p16:designElem xmlns:p16="http://schemas.microsoft.com/office/powerpoint/2015/main" val="1"/>
+              </p:ext>
+            </p:extLst>
+          </p:nvPr>
+        </p:nvSpPr>
+        <p:spPr>
+          <a:xfrm>
+            <a:off x="0" y="0"/>
+            <a:ext cx="12192000" cy="6858000"/>
+          </a:xfrm>
+          <a:prstGeom prst="rect">
+            <a:avLst/>
+          </a:prstGeom>
+          <a:ln w="12700" cap="flat" cmpd="sng" algn="ctr">
+            <a:noFill/>
+            <a:prstDash val="solid"/>
+            <a:miter lim="800000"/>
+          </a:ln>
+          <a:effectLst/>
+          <a:extLst>
+            <a:ext uri="{91240B29-F687-4F45-9708-019B960494DF}">
+              <a14:hiddenLine xmlns:a14="http://schemas.microsoft.com/office/drawing/2010/main" w="12700" cap="flat" cmpd="sng" algn="ctr">
+                <a:solidFill>
+                  <a:schemeClr val="accent1">
+                    <a:shade val="50000"/>
+                  </a:schemeClr>
+                </a:solidFill>
+                <a:prstDash val="solid"/>
+                <a:miter lim="800000"/>
+              </a14:hiddenLine>
+            </a:ext>
+          </a:extLst>
+        </p:spPr>
+        <p:style>
+          <a:lnRef idx="2">
+            <a:schemeClr val="accent1">
+              <a:shade val="50000"/>
+            </a:schemeClr>
+          </a:lnRef>
+          <a:fillRef idx="1">
+            <a:schemeClr val="accent1"/>
+          </a:fillRef>
+          <a:effectRef idx="0">
+            <a:schemeClr val="accent1"/>
+          </a:effectRef>
+          <a:fontRef idx="minor">
+            <a:schemeClr val="lt1"/>
+          </a:fontRef>
+        </p:style>
+        <p:txBody>
+          <a:bodyPr rtlCol="0" anchor="ctr"/>
+          <a:lstStyle/>
+          <a:p>
+            <a:pPr algn="ctr"/>
+            <a:endParaRPr lang="en-US"/>
+          </a:p>
+        </p:txBody>
+      </p:sp>
+      <p:sp>
+        <p:nvSpPr>
+          <p:cNvPr id="9" name="Rectangle 8">
+            <a:extLst>
+              <a:ext uri="{FF2B5EF4-FFF2-40B4-BE49-F238E27FC236}">
+                <a16:creationId xmlns:a16="http://schemas.microsoft.com/office/drawing/2014/main" id="{5CEAD642-85CF-4750-8432-7C80C901F001}"/>
+              </a:ext>
+              <a:ext uri="{C183D7F6-B498-43B3-948B-1728B52AA6E4}">
+                <adec:decorative xmlns:adec="http://schemas.microsoft.com/office/drawing/2017/decorative" val="1"/>
+              </a:ext>
+            </a:extLst>
+          </p:cNvPr>
+          <p:cNvSpPr>
+            <a:spLocks noGrp="1" noRot="1" noChangeAspect="1" noMove="1" noResize="1" noEditPoints="1" noAdjustHandles="1" noChangeArrowheads="1" noChangeShapeType="1" noTextEdit="1"/>
+          </p:cNvSpPr>
+          <p:nvPr>
+            <p:extLst>
+              <p:ext uri="{386F3935-93C4-4BCD-93E2-E3B085C9AB24}">
+                <p16:designElem xmlns:p16="http://schemas.microsoft.com/office/powerpoint/2015/main" val="1"/>
+              </p:ext>
+            </p:extLst>
+          </p:nvPr>
+        </p:nvSpPr>
+        <p:spPr>
+          <a:xfrm>
+            <a:off x="0" y="-427"/>
+            <a:ext cx="12192001" cy="6858000"/>
+          </a:xfrm>
+          <a:prstGeom prst="rect">
+            <a:avLst/>
+          </a:prstGeom>
+          <a:gradFill>
+            <a:gsLst>
+              <a:gs pos="0">
+                <a:srgbClr val="000000"/>
+              </a:gs>
+              <a:gs pos="100000">
+                <a:schemeClr val="accent1">
+                  <a:lumMod val="75000"/>
+                </a:schemeClr>
+              </a:gs>
+            </a:gsLst>
+            <a:lin ang="15000000" scaled="0"/>
+          </a:gradFill>
+          <a:ln>
+            <a:noFill/>
+          </a:ln>
+        </p:spPr>
+        <p:style>
+          <a:lnRef idx="2">
+            <a:schemeClr val="accent1">
+              <a:shade val="50000"/>
+            </a:schemeClr>
+          </a:lnRef>
+          <a:fillRef idx="1">
+            <a:schemeClr val="accent1"/>
+          </a:fillRef>
+          <a:effectRef idx="0">
+            <a:schemeClr val="accent1"/>
+          </a:effectRef>
+          <a:fontRef idx="minor">
+            <a:schemeClr val="lt1"/>
+          </a:fontRef>
+        </p:style>
+        <p:txBody>
+          <a:bodyPr rtlCol="0" anchor="ctr"/>
+          <a:lstStyle/>
+          <a:p>
+            <a:pPr algn="ctr"/>
+            <a:endParaRPr lang="en-US"/>
+          </a:p>
+        </p:txBody>
+      </p:sp>
+      <p:sp>
+        <p:nvSpPr>
+          <p:cNvPr id="11" name="Rectangle 10">
+            <a:extLst>
+              <a:ext uri="{FF2B5EF4-FFF2-40B4-BE49-F238E27FC236}">
+                <a16:creationId xmlns:a16="http://schemas.microsoft.com/office/drawing/2014/main" id="{FA33EEAE-15D5-4119-8C1E-89D943F911EF}"/>
+              </a:ext>
+              <a:ext uri="{C183D7F6-B498-43B3-948B-1728B52AA6E4}">
+                <adec:decorative xmlns:adec="http://schemas.microsoft.com/office/drawing/2017/decorative" val="1"/>
+              </a:ext>
+            </a:extLst>
+          </p:cNvPr>
+          <p:cNvSpPr>
+            <a:spLocks noGrp="1" noRot="1" noChangeAspect="1" noMove="1" noResize="1" noEditPoints="1" noAdjustHandles="1" noChangeArrowheads="1" noChangeShapeType="1" noTextEdit="1"/>
+          </p:cNvSpPr>
+          <p:nvPr>
+            <p:extLst>
+              <p:ext uri="{386F3935-93C4-4BCD-93E2-E3B085C9AB24}">
+                <p16:designElem xmlns:p16="http://schemas.microsoft.com/office/powerpoint/2015/main" val="1"/>
+              </p:ext>
+            </p:extLst>
+          </p:nvPr>
+        </p:nvSpPr>
+        <p:spPr>
+          <a:xfrm rot="10800000" flipH="1">
+            <a:off x="455521" y="-1720"/>
+            <a:ext cx="11750040" cy="6840685"/>
+          </a:xfrm>
+          <a:prstGeom prst="rect">
+            <a:avLst/>
+          </a:prstGeom>
+          <a:gradFill>
+            <a:gsLst>
+              <a:gs pos="21000">
+                <a:schemeClr val="accent1">
+                  <a:lumMod val="50000"/>
+                  <a:alpha val="61000"/>
+                </a:schemeClr>
+              </a:gs>
+              <a:gs pos="100000">
+                <a:schemeClr val="accent1">
+                  <a:alpha val="0"/>
+                </a:schemeClr>
+              </a:gs>
+            </a:gsLst>
+            <a:lin ang="21594000" scaled="0"/>
+          </a:gradFill>
+          <a:ln>
+            <a:noFill/>
+          </a:ln>
+        </p:spPr>
+        <p:style>
+          <a:lnRef idx="2">
+            <a:schemeClr val="accent1">
+              <a:shade val="50000"/>
+            </a:schemeClr>
+          </a:lnRef>
+          <a:fillRef idx="1">
+            <a:schemeClr val="accent1"/>
+          </a:fillRef>
+          <a:effectRef idx="0">
+            <a:schemeClr val="accent1"/>
+          </a:effectRef>
+          <a:fontRef idx="minor">
+            <a:schemeClr val="lt1"/>
+          </a:fontRef>
+        </p:style>
+        <p:txBody>
+          <a:bodyPr rtlCol="0" anchor="ctr"/>
+          <a:lstStyle/>
+          <a:p>
+            <a:pPr algn="ctr"/>
+            <a:endParaRPr lang="en-US"/>
+          </a:p>
+        </p:txBody>
+      </p:sp>
+      <p:sp>
+        <p:nvSpPr>
+          <p:cNvPr id="13" name="Rectangle 12">
+            <a:extLst>
+              <a:ext uri="{FF2B5EF4-FFF2-40B4-BE49-F238E27FC236}">
+                <a16:creationId xmlns:a16="http://schemas.microsoft.com/office/drawing/2014/main" id="{730D8B3B-9B80-4025-B934-26DC7D7CD231}"/>
+              </a:ext>
+              <a:ext uri="{C183D7F6-B498-43B3-948B-1728B52AA6E4}">
+                <adec:decorative xmlns:adec="http://schemas.microsoft.com/office/drawing/2017/decorative" val="1"/>
+              </a:ext>
+            </a:extLst>
+          </p:cNvPr>
+          <p:cNvSpPr>
+            <a:spLocks noGrp="1" noRot="1" noChangeAspect="1" noMove="1" noResize="1" noEditPoints="1" noAdjustHandles="1" noChangeArrowheads="1" noChangeShapeType="1" noTextEdit="1"/>
+          </p:cNvSpPr>
+          <p:nvPr>
+            <p:extLst>
+              <p:ext uri="{386F3935-93C4-4BCD-93E2-E3B085C9AB24}">
+                <p16:designElem xmlns:p16="http://schemas.microsoft.com/office/powerpoint/2015/main" val="1"/>
+              </p:ext>
+            </p:extLst>
+          </p:nvPr>
+        </p:nvSpPr>
+        <p:spPr>
+          <a:xfrm>
+            <a:off x="8606054" y="-1291"/>
+            <a:ext cx="3608179" cy="6858864"/>
+          </a:xfrm>
+          <a:prstGeom prst="rect">
+            <a:avLst/>
+          </a:prstGeom>
+          <a:gradFill>
+            <a:gsLst>
+              <a:gs pos="0">
+                <a:schemeClr val="accent1">
+                  <a:lumMod val="75000"/>
+                  <a:alpha val="0"/>
+                </a:schemeClr>
+              </a:gs>
+              <a:gs pos="99000">
+                <a:srgbClr val="000000">
+                  <a:alpha val="41000"/>
+                </a:srgbClr>
+              </a:gs>
+            </a:gsLst>
+            <a:lin ang="16200000" scaled="0"/>
+          </a:gradFill>
+          <a:ln>
+            <a:noFill/>
+          </a:ln>
+        </p:spPr>
+        <p:style>
+          <a:lnRef idx="2">
+            <a:schemeClr val="accent1">
+              <a:shade val="50000"/>
+            </a:schemeClr>
+          </a:lnRef>
+          <a:fillRef idx="1">
+            <a:schemeClr val="accent1"/>
+          </a:fillRef>
+          <a:effectRef idx="0">
+            <a:schemeClr val="accent1"/>
+          </a:effectRef>
+          <a:fontRef idx="minor">
+            <a:schemeClr val="lt1"/>
+          </a:fontRef>
+        </p:style>
+        <p:txBody>
+          <a:bodyPr rtlCol="0" anchor="ctr"/>
+          <a:lstStyle/>
+          <a:p>
+            <a:pPr algn="ctr"/>
+            <a:endParaRPr lang="en-US"/>
+          </a:p>
+        </p:txBody>
+      </p:sp>
+      <p:sp>
+        <p:nvSpPr>
+          <p:cNvPr id="15" name="Oval 14">
+            <a:extLst>
+              <a:ext uri="{FF2B5EF4-FFF2-40B4-BE49-F238E27FC236}">
+                <a16:creationId xmlns:a16="http://schemas.microsoft.com/office/drawing/2014/main" id="{B5A1B09C-1565-46F8-B70F-621C5EB48A09}"/>
+              </a:ext>
+              <a:ext uri="{C183D7F6-B498-43B3-948B-1728B52AA6E4}">
+                <adec:decorative xmlns:adec="http://schemas.microsoft.com/office/drawing/2017/decorative" val="1"/>
+              </a:ext>
+            </a:extLst>
+          </p:cNvPr>
+          <p:cNvSpPr>
+            <a:spLocks noGrp="1" noRot="1" noChangeAspect="1" noMove="1" noResize="1" noEditPoints="1" noAdjustHandles="1" noChangeArrowheads="1" noChangeShapeType="1" noTextEdit="1"/>
+          </p:cNvSpPr>
+          <p:nvPr>
+            <p:extLst>
+              <p:ext uri="{386F3935-93C4-4BCD-93E2-E3B085C9AB24}">
+                <p16:designElem xmlns:p16="http://schemas.microsoft.com/office/powerpoint/2015/main" val="1"/>
+              </p:ext>
+            </p:extLst>
+          </p:nvPr>
+        </p:nvSpPr>
+        <p:spPr>
+          <a:xfrm rot="15274173">
+            <a:off x="6059728" y="779270"/>
+            <a:ext cx="4967533" cy="4988390"/>
+          </a:xfrm>
+          <a:prstGeom prst="ellipse">
+            <a:avLst/>
+          </a:prstGeom>
+          <a:gradFill>
+            <a:gsLst>
+              <a:gs pos="0">
+                <a:schemeClr val="accent1">
+                  <a:alpha val="24000"/>
+                </a:schemeClr>
+              </a:gs>
+              <a:gs pos="79000">
+                <a:schemeClr val="accent1">
+                  <a:lumMod val="60000"/>
+                  <a:lumOff val="40000"/>
+                  <a:alpha val="0"/>
+                </a:schemeClr>
+              </a:gs>
+            </a:gsLst>
+            <a:lin ang="14400000" scaled="0"/>
+          </a:gradFill>
+          <a:ln>
+            <a:noFill/>
+          </a:ln>
+        </p:spPr>
+        <p:style>
+          <a:lnRef idx="2">
+            <a:schemeClr val="accent1">
+              <a:shade val="50000"/>
+            </a:schemeClr>
+          </a:lnRef>
+          <a:fillRef idx="1">
+            <a:schemeClr val="accent1"/>
+          </a:fillRef>
+          <a:effectRef idx="0">
+            <a:schemeClr val="accent1"/>
+          </a:effectRef>
+          <a:fontRef idx="minor">
+            <a:schemeClr val="lt1"/>
+          </a:fontRef>
+        </p:style>
+        <p:txBody>
+          <a:bodyPr rtlCol="0" anchor="ctr"/>
+          <a:lstStyle/>
+          <a:p>
+            <a:pPr algn="ctr"/>
+            <a:endParaRPr lang="en-US" dirty="0"/>
+          </a:p>
+        </p:txBody>
+      </p:sp>
       <p:sp>
         <p:nvSpPr>
           <p:cNvPr id="2" name="Title 1">
             <a:extLst>
               <a:ext uri="{FF2B5EF4-FFF2-40B4-BE49-F238E27FC236}">
-                <a16:creationId xmlns:a16="http://schemas.microsoft.com/office/drawing/2014/main" id="{7450D0E3-B0F8-5FDF-1E20-BC9C00CD8173}"/>
+                <a16:creationId xmlns:a16="http://schemas.microsoft.com/office/drawing/2014/main" id="{AD3C32FD-06C8-E807-53FC-EFDF5884DEB9}"/>
               </a:ext>
             </a:extLst>
           </p:cNvPr>
@@ -15298,340 +16174,287 @@
             <p:ph type="title"/>
           </p:nvPr>
         </p:nvSpPr>
-        <p:spPr/>
+        <p:spPr>
+          <a:xfrm>
+            <a:off x="1346225" y="321144"/>
+            <a:ext cx="8681695" cy="3268520"/>
+          </a:xfrm>
+        </p:spPr>
         <p:txBody>
-          <a:bodyPr/>
+          <a:bodyPr vert="horz" lIns="91440" tIns="45720" rIns="91440" bIns="45720" rtlCol="0" anchor="b">
+            <a:normAutofit/>
+          </a:bodyPr>
           <a:lstStyle/>
           <a:p>
+            <a:pPr algn="r"/>
             <a:r>
-              <a:rPr lang="en-US" dirty="0"/>
-              <a:t>Mitigation Effects on Revert-related Instability</a:t>
+              <a:rPr lang="en-US" sz="4800" kern="1200" dirty="0">
+                <a:solidFill>
+                  <a:srgbClr val="FFFFFF"/>
+                </a:solidFill>
+                <a:latin typeface="+mj-lt"/>
+                <a:ea typeface="+mj-ea"/>
+                <a:cs typeface="+mj-cs"/>
+              </a:rPr>
+              <a:t>7. Discussion and Conclusion</a:t>
             </a:r>
           </a:p>
         </p:txBody>
       </p:sp>
-      <p:pic>
-        <p:nvPicPr>
-          <p:cNvPr id="5" name="Content Placeholder 4">
+      <p:sp>
+        <p:nvSpPr>
+          <p:cNvPr id="17" name="Rectangle 16">
             <a:extLst>
               <a:ext uri="{FF2B5EF4-FFF2-40B4-BE49-F238E27FC236}">
-                <a16:creationId xmlns:a16="http://schemas.microsoft.com/office/drawing/2014/main" id="{89D0A24F-53B0-40C0-0BB5-1F89B78B709C}"/>
+                <a16:creationId xmlns:a16="http://schemas.microsoft.com/office/drawing/2014/main" id="{8C516CC8-80AC-446C-A56E-9F54B7210402}"/>
+              </a:ext>
+              <a:ext uri="{C183D7F6-B498-43B3-948B-1728B52AA6E4}">
+                <adec:decorative xmlns:adec="http://schemas.microsoft.com/office/drawing/2017/decorative" val="1"/>
               </a:ext>
             </a:extLst>
           </p:cNvPr>
-          <p:cNvPicPr>
-            <a:picLocks noGrp="1" noChangeAspect="1"/>
-          </p:cNvPicPr>
+          <p:cNvSpPr>
+            <a:spLocks noGrp="1" noRot="1" noChangeAspect="1" noMove="1" noResize="1" noEditPoints="1" noAdjustHandles="1" noChangeArrowheads="1" noChangeShapeType="1" noTextEdit="1"/>
+          </p:cNvSpPr>
           <p:nvPr>
-            <p:ph idx="1"/>
+            <p:extLst>
+              <p:ext uri="{386F3935-93C4-4BCD-93E2-E3B085C9AB24}">
+                <p16:designElem xmlns:p16="http://schemas.microsoft.com/office/powerpoint/2015/main" val="1"/>
+              </p:ext>
+            </p:extLst>
           </p:nvPr>
-        </p:nvPicPr>
-        <p:blipFill>
-          <a:blip r:embed="rId2">
-            <a:extLst>
-              <a:ext uri="{28A0092B-C50C-407E-A947-70E740481C1C}">
-                <a14:useLocalDpi xmlns:a14="http://schemas.microsoft.com/office/drawing/2010/main" val="0"/>
-              </a:ext>
-            </a:extLst>
-          </a:blip>
-          <a:stretch>
-            <a:fillRect/>
-          </a:stretch>
-        </p:blipFill>
+        </p:nvSpPr>
         <p:spPr>
-          <a:xfrm>
-            <a:off x="5975803" y="1405243"/>
-            <a:ext cx="6216197" cy="4351338"/>
+          <a:xfrm rot="10800000" flipH="1">
+            <a:off x="6314" y="4480038"/>
+            <a:ext cx="12179371" cy="2377962"/>
           </a:xfrm>
           <a:prstGeom prst="rect">
             <a:avLst/>
           </a:prstGeom>
+          <a:gradFill>
+            <a:gsLst>
+              <a:gs pos="0">
+                <a:schemeClr val="accent1">
+                  <a:lumMod val="75000"/>
+                  <a:alpha val="50000"/>
+                </a:schemeClr>
+              </a:gs>
+              <a:gs pos="99000">
+                <a:srgbClr val="000000">
+                  <a:alpha val="34000"/>
+                </a:srgbClr>
+              </a:gs>
+            </a:gsLst>
+            <a:lin ang="17400000" scaled="0"/>
+          </a:gradFill>
+          <a:ln>
+            <a:noFill/>
+          </a:ln>
         </p:spPr>
-      </p:pic>
+        <p:style>
+          <a:lnRef idx="2">
+            <a:schemeClr val="accent1">
+              <a:shade val="50000"/>
+            </a:schemeClr>
+          </a:lnRef>
+          <a:fillRef idx="1">
+            <a:schemeClr val="accent1"/>
+          </a:fillRef>
+          <a:effectRef idx="0">
+            <a:schemeClr val="accent1"/>
+          </a:effectRef>
+          <a:fontRef idx="minor">
+            <a:schemeClr val="lt1"/>
+          </a:fontRef>
+        </p:style>
+        <p:txBody>
+          <a:bodyPr rtlCol="0" anchor="ctr"/>
+          <a:lstStyle/>
+          <a:p>
+            <a:pPr algn="ctr"/>
+            <a:endParaRPr lang="en-US"/>
+          </a:p>
+        </p:txBody>
+      </p:sp>
       <p:sp>
         <p:nvSpPr>
-          <p:cNvPr id="12" name="Content Placeholder 2">
+          <p:cNvPr id="19" name="Rectangle 18">
             <a:extLst>
               <a:ext uri="{FF2B5EF4-FFF2-40B4-BE49-F238E27FC236}">
-                <a16:creationId xmlns:a16="http://schemas.microsoft.com/office/drawing/2014/main" id="{DDB026EA-1AE9-E926-F893-8858F49FF097}"/>
+                <a16:creationId xmlns:a16="http://schemas.microsoft.com/office/drawing/2014/main" id="{53947E58-F088-49F1-A3D1-DEA690192E84}"/>
+              </a:ext>
+              <a:ext uri="{C183D7F6-B498-43B3-948B-1728B52AA6E4}">
+                <adec:decorative xmlns:adec="http://schemas.microsoft.com/office/drawing/2017/decorative" val="1"/>
               </a:ext>
             </a:extLst>
           </p:cNvPr>
-          <p:cNvSpPr txBox="1">
-            <a:spLocks/>
+          <p:cNvSpPr>
+            <a:spLocks noGrp="1" noRot="1" noChangeAspect="1" noMove="1" noResize="1" noEditPoints="1" noAdjustHandles="1" noChangeArrowheads="1" noChangeShapeType="1" noTextEdit="1"/>
           </p:cNvSpPr>
-          <p:nvPr/>
+          <p:nvPr>
+            <p:extLst>
+              <p:ext uri="{386F3935-93C4-4BCD-93E2-E3B085C9AB24}">
+                <p16:designElem xmlns:p16="http://schemas.microsoft.com/office/powerpoint/2015/main" val="1"/>
+              </p:ext>
+            </p:extLst>
+          </p:nvPr>
         </p:nvSpPr>
         <p:spPr>
-          <a:xfrm>
-            <a:off x="330199" y="1690688"/>
-            <a:ext cx="6216197" cy="5032375"/>
+          <a:xfrm rot="16200000" flipH="1">
+            <a:off x="6967085" y="1632660"/>
+            <a:ext cx="6857572" cy="3592258"/>
           </a:xfrm>
           <a:prstGeom prst="rect">
             <a:avLst/>
           </a:prstGeom>
+          <a:gradFill>
+            <a:gsLst>
+              <a:gs pos="0">
+                <a:schemeClr val="accent1">
+                  <a:lumMod val="75000"/>
+                  <a:alpha val="50000"/>
+                </a:schemeClr>
+              </a:gs>
+              <a:gs pos="99000">
+                <a:srgbClr val="000000">
+                  <a:alpha val="0"/>
+                </a:srgbClr>
+              </a:gs>
+            </a:gsLst>
+            <a:lin ang="15600000" scaled="0"/>
+          </a:gradFill>
+          <a:ln>
+            <a:noFill/>
+          </a:ln>
         </p:spPr>
+        <p:style>
+          <a:lnRef idx="2">
+            <a:schemeClr val="accent1">
+              <a:shade val="50000"/>
+            </a:schemeClr>
+          </a:lnRef>
+          <a:fillRef idx="1">
+            <a:schemeClr val="accent1"/>
+          </a:fillRef>
+          <a:effectRef idx="0">
+            <a:schemeClr val="accent1"/>
+          </a:effectRef>
+          <a:fontRef idx="minor">
+            <a:schemeClr val="lt1"/>
+          </a:fontRef>
+        </p:style>
         <p:txBody>
-          <a:bodyPr vert="horz" lIns="91440" tIns="45720" rIns="91440" bIns="45720" rtlCol="0">
-            <a:normAutofit fontScale="92500"/>
-          </a:bodyPr>
-          <a:lstStyle>
-            <a:lvl1pPr marL="228600" indent="-228600" algn="l" defTabSz="914400" rtl="0" eaLnBrk="1" latinLnBrk="0" hangingPunct="1">
-              <a:lnSpc>
-                <a:spcPct val="90000"/>
-              </a:lnSpc>
-              <a:spcBef>
-                <a:spcPts val="1000"/>
-              </a:spcBef>
-              <a:buFont typeface="Arial" panose="020B0604020202020204" pitchFamily="34" charset="0"/>
-              <a:buChar char="•"/>
-              <a:defRPr sz="2800" kern="1200">
-                <a:solidFill>
-                  <a:schemeClr val="tx1"/>
-                </a:solidFill>
-                <a:latin typeface="+mn-lt"/>
-                <a:ea typeface="+mn-ea"/>
-                <a:cs typeface="+mn-cs"/>
-              </a:defRPr>
-            </a:lvl1pPr>
-            <a:lvl2pPr marL="685800" indent="-228600" algn="l" defTabSz="914400" rtl="0" eaLnBrk="1" latinLnBrk="0" hangingPunct="1">
-              <a:lnSpc>
-                <a:spcPct val="90000"/>
-              </a:lnSpc>
-              <a:spcBef>
-                <a:spcPts val="500"/>
-              </a:spcBef>
-              <a:buFont typeface="Arial" panose="020B0604020202020204" pitchFamily="34" charset="0"/>
-              <a:buChar char="•"/>
-              <a:defRPr sz="2400" kern="1200">
-                <a:solidFill>
-                  <a:schemeClr val="tx1"/>
-                </a:solidFill>
-                <a:latin typeface="+mn-lt"/>
-                <a:ea typeface="+mn-ea"/>
-                <a:cs typeface="+mn-cs"/>
-              </a:defRPr>
-            </a:lvl2pPr>
-            <a:lvl3pPr marL="1143000" indent="-228600" algn="l" defTabSz="914400" rtl="0" eaLnBrk="1" latinLnBrk="0" hangingPunct="1">
-              <a:lnSpc>
-                <a:spcPct val="90000"/>
-              </a:lnSpc>
-              <a:spcBef>
-                <a:spcPts val="500"/>
-              </a:spcBef>
-              <a:buFont typeface="Arial" panose="020B0604020202020204" pitchFamily="34" charset="0"/>
-              <a:buChar char="•"/>
-              <a:defRPr sz="2000" kern="1200">
-                <a:solidFill>
-                  <a:schemeClr val="tx1"/>
-                </a:solidFill>
-                <a:latin typeface="+mn-lt"/>
-                <a:ea typeface="+mn-ea"/>
-                <a:cs typeface="+mn-cs"/>
-              </a:defRPr>
-            </a:lvl3pPr>
-            <a:lvl4pPr marL="1600200" indent="-228600" algn="l" defTabSz="914400" rtl="0" eaLnBrk="1" latinLnBrk="0" hangingPunct="1">
-              <a:lnSpc>
-                <a:spcPct val="90000"/>
-              </a:lnSpc>
-              <a:spcBef>
-                <a:spcPts val="500"/>
-              </a:spcBef>
-              <a:buFont typeface="Arial" panose="020B0604020202020204" pitchFamily="34" charset="0"/>
-              <a:buChar char="•"/>
-              <a:defRPr sz="1800" kern="1200">
-                <a:solidFill>
-                  <a:schemeClr val="tx1"/>
-                </a:solidFill>
-                <a:latin typeface="+mn-lt"/>
-                <a:ea typeface="+mn-ea"/>
-                <a:cs typeface="+mn-cs"/>
-              </a:defRPr>
-            </a:lvl4pPr>
-            <a:lvl5pPr marL="2057400" indent="-228600" algn="l" defTabSz="914400" rtl="0" eaLnBrk="1" latinLnBrk="0" hangingPunct="1">
-              <a:lnSpc>
-                <a:spcPct val="90000"/>
-              </a:lnSpc>
-              <a:spcBef>
-                <a:spcPts val="500"/>
-              </a:spcBef>
-              <a:buFont typeface="Arial" panose="020B0604020202020204" pitchFamily="34" charset="0"/>
-              <a:buChar char="•"/>
-              <a:defRPr sz="1800" kern="1200">
-                <a:solidFill>
-                  <a:schemeClr val="tx1"/>
-                </a:solidFill>
-                <a:latin typeface="+mn-lt"/>
-                <a:ea typeface="+mn-ea"/>
-                <a:cs typeface="+mn-cs"/>
-              </a:defRPr>
-            </a:lvl5pPr>
-            <a:lvl6pPr marL="2514600" indent="-228600" algn="l" defTabSz="914400" rtl="0" eaLnBrk="1" latinLnBrk="0" hangingPunct="1">
-              <a:lnSpc>
-                <a:spcPct val="90000"/>
-              </a:lnSpc>
-              <a:spcBef>
-                <a:spcPts val="500"/>
-              </a:spcBef>
-              <a:buFont typeface="Arial" panose="020B0604020202020204" pitchFamily="34" charset="0"/>
-              <a:buChar char="•"/>
-              <a:defRPr sz="1800" kern="1200">
-                <a:solidFill>
-                  <a:schemeClr val="tx1"/>
-                </a:solidFill>
-                <a:latin typeface="+mn-lt"/>
-                <a:ea typeface="+mn-ea"/>
-                <a:cs typeface="+mn-cs"/>
-              </a:defRPr>
-            </a:lvl6pPr>
-            <a:lvl7pPr marL="2971800" indent="-228600" algn="l" defTabSz="914400" rtl="0" eaLnBrk="1" latinLnBrk="0" hangingPunct="1">
-              <a:lnSpc>
-                <a:spcPct val="90000"/>
-              </a:lnSpc>
-              <a:spcBef>
-                <a:spcPts val="500"/>
-              </a:spcBef>
-              <a:buFont typeface="Arial" panose="020B0604020202020204" pitchFamily="34" charset="0"/>
-              <a:buChar char="•"/>
-              <a:defRPr sz="1800" kern="1200">
-                <a:solidFill>
-                  <a:schemeClr val="tx1"/>
-                </a:solidFill>
-                <a:latin typeface="+mn-lt"/>
-                <a:ea typeface="+mn-ea"/>
-                <a:cs typeface="+mn-cs"/>
-              </a:defRPr>
-            </a:lvl7pPr>
-            <a:lvl8pPr marL="3429000" indent="-228600" algn="l" defTabSz="914400" rtl="0" eaLnBrk="1" latinLnBrk="0" hangingPunct="1">
-              <a:lnSpc>
-                <a:spcPct val="90000"/>
-              </a:lnSpc>
-              <a:spcBef>
-                <a:spcPts val="500"/>
-              </a:spcBef>
-              <a:buFont typeface="Arial" panose="020B0604020202020204" pitchFamily="34" charset="0"/>
-              <a:buChar char="•"/>
-              <a:defRPr sz="1800" kern="1200">
-                <a:solidFill>
-                  <a:schemeClr val="tx1"/>
-                </a:solidFill>
-                <a:latin typeface="+mn-lt"/>
-                <a:ea typeface="+mn-ea"/>
-                <a:cs typeface="+mn-cs"/>
-              </a:defRPr>
-            </a:lvl8pPr>
-            <a:lvl9pPr marL="3886200" indent="-228600" algn="l" defTabSz="914400" rtl="0" eaLnBrk="1" latinLnBrk="0" hangingPunct="1">
-              <a:lnSpc>
-                <a:spcPct val="90000"/>
-              </a:lnSpc>
-              <a:spcBef>
-                <a:spcPts val="500"/>
-              </a:spcBef>
-              <a:buFont typeface="Arial" panose="020B0604020202020204" pitchFamily="34" charset="0"/>
-              <a:buChar char="•"/>
-              <a:defRPr sz="1800" kern="1200">
-                <a:solidFill>
-                  <a:schemeClr val="tx1"/>
-                </a:solidFill>
-                <a:latin typeface="+mn-lt"/>
-                <a:ea typeface="+mn-ea"/>
-                <a:cs typeface="+mn-cs"/>
-              </a:defRPr>
-            </a:lvl9pPr>
-          </a:lstStyle>
-          <a:p>
-            <a:pPr marL="0" indent="0">
-              <a:buNone/>
-            </a:pPr>
-            <a:r>
-              <a:rPr lang="en-US" b="1" dirty="0"/>
-              <a:t>Revert-related instability </a:t>
-            </a:r>
-          </a:p>
-          <a:p>
-            <a:pPr marL="0" indent="0">
-              <a:buNone/>
-            </a:pPr>
-            <a:r>
-              <a:rPr lang="en-US" dirty="0"/>
-              <a:t>= Editors undo each other’s edits, indicating disagreement or conflict</a:t>
-            </a:r>
-          </a:p>
-          <a:p>
-            <a:pPr marL="0" indent="0">
-              <a:buNone/>
-            </a:pPr>
-            <a:r>
-              <a:rPr lang="en-US" b="1" dirty="0"/>
-              <a:t>Y-axis: </a:t>
-            </a:r>
-            <a:r>
-              <a:rPr lang="en-US" dirty="0"/>
-              <a:t>Mean Reverted-Edit Share </a:t>
-            </a:r>
-            <a:r>
-              <a:rPr lang="en-US" b="1" dirty="0"/>
-              <a:t>(%)</a:t>
-            </a:r>
-          </a:p>
-          <a:p>
-            <a:pPr marL="0" indent="0">
-              <a:buNone/>
-            </a:pPr>
-            <a:r>
-              <a:rPr lang="en-US" dirty="0"/>
-              <a:t>=Share of edits that are reverted </a:t>
-            </a:r>
-          </a:p>
-          <a:p>
-            <a:pPr marL="0" indent="0">
-              <a:buNone/>
-            </a:pPr>
-            <a:r>
-              <a:rPr lang="en-US" dirty="0"/>
-              <a:t>Lower values → more stable and agreed content</a:t>
-            </a:r>
-            <a:br>
-              <a:rPr lang="en-US" dirty="0"/>
-            </a:br>
-            <a:endParaRPr lang="en-US" dirty="0"/>
-          </a:p>
-          <a:p>
-            <a:pPr marL="0" indent="0">
-              <a:buNone/>
-            </a:pPr>
-            <a:r>
-              <a:rPr lang="en-US" b="1" dirty="0"/>
-              <a:t>Key Results</a:t>
-            </a:r>
-          </a:p>
-          <a:p>
-            <a:r>
-              <a:rPr lang="en-US" dirty="0"/>
-              <a:t>Revert filtering → reduces reverted share</a:t>
-            </a:r>
-          </a:p>
-          <a:p>
-            <a:r>
-              <a:rPr lang="en-US" dirty="0"/>
-              <a:t> Revert weighting → also effective </a:t>
-            </a:r>
-          </a:p>
-          <a:p>
-            <a:endParaRPr lang="en-US" dirty="0"/>
+          <a:bodyPr rtlCol="0" anchor="ctr"/>
+          <a:lstStyle/>
+          <a:p>
+            <a:pPr algn="ctr"/>
+            <a:endParaRPr lang="en-US"/>
           </a:p>
         </p:txBody>
       </p:sp>
     </p:spTree>
     <p:extLst>
       <p:ext uri="{BB962C8B-B14F-4D97-AF65-F5344CB8AC3E}">
-        <p14:creationId xmlns:p14="http://schemas.microsoft.com/office/powerpoint/2010/main" val="53960310"/>
+        <p14:creationId xmlns:p14="http://schemas.microsoft.com/office/powerpoint/2010/main" val="3071330222"/>
       </p:ext>
     </p:extLst>
   </p:cSld>
   <p:clrMapOvr>
     <a:masterClrMapping/>
   </p:clrMapOvr>
+  <p:timing>
+    <p:tnLst>
+      <p:par>
+        <p:cTn id="1" dur="indefinite" restart="never" nodeType="tmRoot">
+          <p:childTnLst>
+            <p:seq concurrent="1" nextAc="seek">
+              <p:cTn id="2" dur="indefinite" nodeType="mainSeq">
+                <p:childTnLst>
+                  <p:par>
+                    <p:cTn id="3" fill="hold">
+                      <p:stCondLst>
+                        <p:cond delay="indefinite"/>
+                        <p:cond evt="onBegin" delay="0">
+                          <p:tn val="2"/>
+                        </p:cond>
+                      </p:stCondLst>
+                      <p:childTnLst>
+                        <p:par>
+                          <p:cTn id="4" fill="hold">
+                            <p:stCondLst>
+                              <p:cond delay="0"/>
+                            </p:stCondLst>
+                            <p:childTnLst>
+                              <p:par>
+                                <p:cTn id="5" presetID="10" presetClass="entr" presetSubtype="0" fill="hold" grpId="0" nodeType="withEffect">
+                                  <p:stCondLst>
+                                    <p:cond delay="500"/>
+                                  </p:stCondLst>
+                                  <p:iterate type="wd">
+                                    <p:tmPct val="15000"/>
+                                  </p:iterate>
+                                  <p:childTnLst>
+                                    <p:set>
+                                      <p:cBhvr>
+                                        <p:cTn id="6" dur="1" fill="hold">
+                                          <p:stCondLst>
+                                            <p:cond delay="0"/>
+                                          </p:stCondLst>
+                                        </p:cTn>
+                                        <p:tgtEl>
+                                          <p:spTgt spid="2"/>
+                                        </p:tgtEl>
+                                        <p:attrNameLst>
+                                          <p:attrName>style.visibility</p:attrName>
+                                        </p:attrNameLst>
+                                      </p:cBhvr>
+                                      <p:to>
+                                        <p:strVal val="visible"/>
+                                      </p:to>
+                                    </p:set>
+                                    <p:animEffect transition="in" filter="fade">
+                                      <p:cBhvr>
+                                        <p:cTn id="7" dur="1000"/>
+                                        <p:tgtEl>
+                                          <p:spTgt spid="2"/>
+                                        </p:tgtEl>
+                                      </p:cBhvr>
+                                    </p:animEffect>
+                                  </p:childTnLst>
+                                </p:cTn>
+                              </p:par>
+                            </p:childTnLst>
+                          </p:cTn>
+                        </p:par>
+                      </p:childTnLst>
+                    </p:cTn>
+                  </p:par>
+                </p:childTnLst>
+              </p:cTn>
+              <p:prevCondLst>
+                <p:cond evt="onPrev" delay="0">
+                  <p:tgtEl>
+                    <p:sldTgt/>
+                  </p:tgtEl>
+                </p:cond>
+              </p:prevCondLst>
+              <p:nextCondLst>
+                <p:cond evt="onNext" delay="0">
+                  <p:tgtEl>
+                    <p:sldTgt/>
+                  </p:tgtEl>
+                </p:cond>
+              </p:nextCondLst>
+            </p:seq>
+          </p:childTnLst>
+        </p:cTn>
+      </p:par>
+    </p:tnLst>
+    <p:bldLst>
+      <p:bldP spid="2" grpId="0"/>
+    </p:bldLst>
+  </p:timing>
 </p:sld>
 </file>
 
@@ -16339,709 +17162,6 @@
 </file>
 
 <file path=ppt/slides/slide20.xml><?xml version="1.0" encoding="utf-8"?>
-<p:sld xmlns:a="http://schemas.openxmlformats.org/drawingml/2006/main" xmlns:r="http://schemas.openxmlformats.org/officeDocument/2006/relationships" xmlns:p="http://schemas.openxmlformats.org/presentationml/2006/main">
-  <p:cSld>
-    <p:bg>
-      <p:bgPr>
-        <a:solidFill>
-          <a:schemeClr val="bg1"/>
-        </a:solidFill>
-        <a:effectLst/>
-      </p:bgPr>
-    </p:bg>
-    <p:spTree>
-      <p:nvGrpSpPr>
-        <p:cNvPr id="1" name=""/>
-        <p:cNvGrpSpPr/>
-        <p:nvPr/>
-      </p:nvGrpSpPr>
-      <p:grpSpPr>
-        <a:xfrm>
-          <a:off x="0" y="0"/>
-          <a:ext cx="0" cy="0"/>
-          <a:chOff x="0" y="0"/>
-          <a:chExt cx="0" cy="0"/>
-        </a:xfrm>
-      </p:grpSpPr>
-      <p:sp useBgFill="1">
-        <p:nvSpPr>
-          <p:cNvPr id="7" name="Rectangle 6">
-            <a:extLst>
-              <a:ext uri="{FF2B5EF4-FFF2-40B4-BE49-F238E27FC236}">
-                <a16:creationId xmlns:a16="http://schemas.microsoft.com/office/drawing/2014/main" id="{0E30439A-8A5B-46EC-8283-9B6B031D40D0}"/>
-              </a:ext>
-              <a:ext uri="{C183D7F6-B498-43B3-948B-1728B52AA6E4}">
-                <adec:decorative xmlns:adec="http://schemas.microsoft.com/office/drawing/2017/decorative" val="1"/>
-              </a:ext>
-            </a:extLst>
-          </p:cNvPr>
-          <p:cNvSpPr>
-            <a:spLocks noGrp="1" noRot="1" noChangeAspect="1" noMove="1" noResize="1" noEditPoints="1" noAdjustHandles="1" noChangeArrowheads="1" noChangeShapeType="1" noTextEdit="1"/>
-          </p:cNvSpPr>
-          <p:nvPr>
-            <p:extLst>
-              <p:ext uri="{386F3935-93C4-4BCD-93E2-E3B085C9AB24}">
-                <p16:designElem xmlns:p16="http://schemas.microsoft.com/office/powerpoint/2015/main" val="1"/>
-              </p:ext>
-            </p:extLst>
-          </p:nvPr>
-        </p:nvSpPr>
-        <p:spPr>
-          <a:xfrm>
-            <a:off x="0" y="0"/>
-            <a:ext cx="12192000" cy="6858000"/>
-          </a:xfrm>
-          <a:prstGeom prst="rect">
-            <a:avLst/>
-          </a:prstGeom>
-          <a:ln w="12700" cap="flat" cmpd="sng" algn="ctr">
-            <a:noFill/>
-            <a:prstDash val="solid"/>
-            <a:miter lim="800000"/>
-          </a:ln>
-          <a:effectLst/>
-          <a:extLst>
-            <a:ext uri="{91240B29-F687-4F45-9708-019B960494DF}">
-              <a14:hiddenLine xmlns:a14="http://schemas.microsoft.com/office/drawing/2010/main" w="12700" cap="flat" cmpd="sng" algn="ctr">
-                <a:solidFill>
-                  <a:schemeClr val="accent1">
-                    <a:shade val="50000"/>
-                  </a:schemeClr>
-                </a:solidFill>
-                <a:prstDash val="solid"/>
-                <a:miter lim="800000"/>
-              </a14:hiddenLine>
-            </a:ext>
-          </a:extLst>
-        </p:spPr>
-        <p:style>
-          <a:lnRef idx="2">
-            <a:schemeClr val="accent1">
-              <a:shade val="50000"/>
-            </a:schemeClr>
-          </a:lnRef>
-          <a:fillRef idx="1">
-            <a:schemeClr val="accent1"/>
-          </a:fillRef>
-          <a:effectRef idx="0">
-            <a:schemeClr val="accent1"/>
-          </a:effectRef>
-          <a:fontRef idx="minor">
-            <a:schemeClr val="lt1"/>
-          </a:fontRef>
-        </p:style>
-        <p:txBody>
-          <a:bodyPr rtlCol="0" anchor="ctr"/>
-          <a:lstStyle/>
-          <a:p>
-            <a:pPr algn="ctr"/>
-            <a:endParaRPr lang="en-US"/>
-          </a:p>
-        </p:txBody>
-      </p:sp>
-      <p:sp>
-        <p:nvSpPr>
-          <p:cNvPr id="9" name="Rectangle 8">
-            <a:extLst>
-              <a:ext uri="{FF2B5EF4-FFF2-40B4-BE49-F238E27FC236}">
-                <a16:creationId xmlns:a16="http://schemas.microsoft.com/office/drawing/2014/main" id="{5CEAD642-85CF-4750-8432-7C80C901F001}"/>
-              </a:ext>
-              <a:ext uri="{C183D7F6-B498-43B3-948B-1728B52AA6E4}">
-                <adec:decorative xmlns:adec="http://schemas.microsoft.com/office/drawing/2017/decorative" val="1"/>
-              </a:ext>
-            </a:extLst>
-          </p:cNvPr>
-          <p:cNvSpPr>
-            <a:spLocks noGrp="1" noRot="1" noChangeAspect="1" noMove="1" noResize="1" noEditPoints="1" noAdjustHandles="1" noChangeArrowheads="1" noChangeShapeType="1" noTextEdit="1"/>
-          </p:cNvSpPr>
-          <p:nvPr>
-            <p:extLst>
-              <p:ext uri="{386F3935-93C4-4BCD-93E2-E3B085C9AB24}">
-                <p16:designElem xmlns:p16="http://schemas.microsoft.com/office/powerpoint/2015/main" val="1"/>
-              </p:ext>
-            </p:extLst>
-          </p:nvPr>
-        </p:nvSpPr>
-        <p:spPr>
-          <a:xfrm>
-            <a:off x="0" y="-427"/>
-            <a:ext cx="12192001" cy="6858000"/>
-          </a:xfrm>
-          <a:prstGeom prst="rect">
-            <a:avLst/>
-          </a:prstGeom>
-          <a:gradFill>
-            <a:gsLst>
-              <a:gs pos="0">
-                <a:srgbClr val="000000"/>
-              </a:gs>
-              <a:gs pos="100000">
-                <a:schemeClr val="accent1">
-                  <a:lumMod val="75000"/>
-                </a:schemeClr>
-              </a:gs>
-            </a:gsLst>
-            <a:lin ang="15000000" scaled="0"/>
-          </a:gradFill>
-          <a:ln>
-            <a:noFill/>
-          </a:ln>
-        </p:spPr>
-        <p:style>
-          <a:lnRef idx="2">
-            <a:schemeClr val="accent1">
-              <a:shade val="50000"/>
-            </a:schemeClr>
-          </a:lnRef>
-          <a:fillRef idx="1">
-            <a:schemeClr val="accent1"/>
-          </a:fillRef>
-          <a:effectRef idx="0">
-            <a:schemeClr val="accent1"/>
-          </a:effectRef>
-          <a:fontRef idx="minor">
-            <a:schemeClr val="lt1"/>
-          </a:fontRef>
-        </p:style>
-        <p:txBody>
-          <a:bodyPr rtlCol="0" anchor="ctr"/>
-          <a:lstStyle/>
-          <a:p>
-            <a:pPr algn="ctr"/>
-            <a:endParaRPr lang="en-US"/>
-          </a:p>
-        </p:txBody>
-      </p:sp>
-      <p:sp>
-        <p:nvSpPr>
-          <p:cNvPr id="11" name="Rectangle 10">
-            <a:extLst>
-              <a:ext uri="{FF2B5EF4-FFF2-40B4-BE49-F238E27FC236}">
-                <a16:creationId xmlns:a16="http://schemas.microsoft.com/office/drawing/2014/main" id="{FA33EEAE-15D5-4119-8C1E-89D943F911EF}"/>
-              </a:ext>
-              <a:ext uri="{C183D7F6-B498-43B3-948B-1728B52AA6E4}">
-                <adec:decorative xmlns:adec="http://schemas.microsoft.com/office/drawing/2017/decorative" val="1"/>
-              </a:ext>
-            </a:extLst>
-          </p:cNvPr>
-          <p:cNvSpPr>
-            <a:spLocks noGrp="1" noRot="1" noChangeAspect="1" noMove="1" noResize="1" noEditPoints="1" noAdjustHandles="1" noChangeArrowheads="1" noChangeShapeType="1" noTextEdit="1"/>
-          </p:cNvSpPr>
-          <p:nvPr>
-            <p:extLst>
-              <p:ext uri="{386F3935-93C4-4BCD-93E2-E3B085C9AB24}">
-                <p16:designElem xmlns:p16="http://schemas.microsoft.com/office/powerpoint/2015/main" val="1"/>
-              </p:ext>
-            </p:extLst>
-          </p:nvPr>
-        </p:nvSpPr>
-        <p:spPr>
-          <a:xfrm rot="10800000" flipH="1">
-            <a:off x="455521" y="-1720"/>
-            <a:ext cx="11750040" cy="6840685"/>
-          </a:xfrm>
-          <a:prstGeom prst="rect">
-            <a:avLst/>
-          </a:prstGeom>
-          <a:gradFill>
-            <a:gsLst>
-              <a:gs pos="21000">
-                <a:schemeClr val="accent1">
-                  <a:lumMod val="50000"/>
-                  <a:alpha val="61000"/>
-                </a:schemeClr>
-              </a:gs>
-              <a:gs pos="100000">
-                <a:schemeClr val="accent1">
-                  <a:alpha val="0"/>
-                </a:schemeClr>
-              </a:gs>
-            </a:gsLst>
-            <a:lin ang="21594000" scaled="0"/>
-          </a:gradFill>
-          <a:ln>
-            <a:noFill/>
-          </a:ln>
-        </p:spPr>
-        <p:style>
-          <a:lnRef idx="2">
-            <a:schemeClr val="accent1">
-              <a:shade val="50000"/>
-            </a:schemeClr>
-          </a:lnRef>
-          <a:fillRef idx="1">
-            <a:schemeClr val="accent1"/>
-          </a:fillRef>
-          <a:effectRef idx="0">
-            <a:schemeClr val="accent1"/>
-          </a:effectRef>
-          <a:fontRef idx="minor">
-            <a:schemeClr val="lt1"/>
-          </a:fontRef>
-        </p:style>
-        <p:txBody>
-          <a:bodyPr rtlCol="0" anchor="ctr"/>
-          <a:lstStyle/>
-          <a:p>
-            <a:pPr algn="ctr"/>
-            <a:endParaRPr lang="en-US"/>
-          </a:p>
-        </p:txBody>
-      </p:sp>
-      <p:sp>
-        <p:nvSpPr>
-          <p:cNvPr id="13" name="Rectangle 12">
-            <a:extLst>
-              <a:ext uri="{FF2B5EF4-FFF2-40B4-BE49-F238E27FC236}">
-                <a16:creationId xmlns:a16="http://schemas.microsoft.com/office/drawing/2014/main" id="{730D8B3B-9B80-4025-B934-26DC7D7CD231}"/>
-              </a:ext>
-              <a:ext uri="{C183D7F6-B498-43B3-948B-1728B52AA6E4}">
-                <adec:decorative xmlns:adec="http://schemas.microsoft.com/office/drawing/2017/decorative" val="1"/>
-              </a:ext>
-            </a:extLst>
-          </p:cNvPr>
-          <p:cNvSpPr>
-            <a:spLocks noGrp="1" noRot="1" noChangeAspect="1" noMove="1" noResize="1" noEditPoints="1" noAdjustHandles="1" noChangeArrowheads="1" noChangeShapeType="1" noTextEdit="1"/>
-          </p:cNvSpPr>
-          <p:nvPr>
-            <p:extLst>
-              <p:ext uri="{386F3935-93C4-4BCD-93E2-E3B085C9AB24}">
-                <p16:designElem xmlns:p16="http://schemas.microsoft.com/office/powerpoint/2015/main" val="1"/>
-              </p:ext>
-            </p:extLst>
-          </p:nvPr>
-        </p:nvSpPr>
-        <p:spPr>
-          <a:xfrm>
-            <a:off x="8606054" y="-1291"/>
-            <a:ext cx="3608179" cy="6858864"/>
-          </a:xfrm>
-          <a:prstGeom prst="rect">
-            <a:avLst/>
-          </a:prstGeom>
-          <a:gradFill>
-            <a:gsLst>
-              <a:gs pos="0">
-                <a:schemeClr val="accent1">
-                  <a:lumMod val="75000"/>
-                  <a:alpha val="0"/>
-                </a:schemeClr>
-              </a:gs>
-              <a:gs pos="99000">
-                <a:srgbClr val="000000">
-                  <a:alpha val="41000"/>
-                </a:srgbClr>
-              </a:gs>
-            </a:gsLst>
-            <a:lin ang="16200000" scaled="0"/>
-          </a:gradFill>
-          <a:ln>
-            <a:noFill/>
-          </a:ln>
-        </p:spPr>
-        <p:style>
-          <a:lnRef idx="2">
-            <a:schemeClr val="accent1">
-              <a:shade val="50000"/>
-            </a:schemeClr>
-          </a:lnRef>
-          <a:fillRef idx="1">
-            <a:schemeClr val="accent1"/>
-          </a:fillRef>
-          <a:effectRef idx="0">
-            <a:schemeClr val="accent1"/>
-          </a:effectRef>
-          <a:fontRef idx="minor">
-            <a:schemeClr val="lt1"/>
-          </a:fontRef>
-        </p:style>
-        <p:txBody>
-          <a:bodyPr rtlCol="0" anchor="ctr"/>
-          <a:lstStyle/>
-          <a:p>
-            <a:pPr algn="ctr"/>
-            <a:endParaRPr lang="en-US"/>
-          </a:p>
-        </p:txBody>
-      </p:sp>
-      <p:sp>
-        <p:nvSpPr>
-          <p:cNvPr id="15" name="Oval 14">
-            <a:extLst>
-              <a:ext uri="{FF2B5EF4-FFF2-40B4-BE49-F238E27FC236}">
-                <a16:creationId xmlns:a16="http://schemas.microsoft.com/office/drawing/2014/main" id="{B5A1B09C-1565-46F8-B70F-621C5EB48A09}"/>
-              </a:ext>
-              <a:ext uri="{C183D7F6-B498-43B3-948B-1728B52AA6E4}">
-                <adec:decorative xmlns:adec="http://schemas.microsoft.com/office/drawing/2017/decorative" val="1"/>
-              </a:ext>
-            </a:extLst>
-          </p:cNvPr>
-          <p:cNvSpPr>
-            <a:spLocks noGrp="1" noRot="1" noChangeAspect="1" noMove="1" noResize="1" noEditPoints="1" noAdjustHandles="1" noChangeArrowheads="1" noChangeShapeType="1" noTextEdit="1"/>
-          </p:cNvSpPr>
-          <p:nvPr>
-            <p:extLst>
-              <p:ext uri="{386F3935-93C4-4BCD-93E2-E3B085C9AB24}">
-                <p16:designElem xmlns:p16="http://schemas.microsoft.com/office/powerpoint/2015/main" val="1"/>
-              </p:ext>
-            </p:extLst>
-          </p:nvPr>
-        </p:nvSpPr>
-        <p:spPr>
-          <a:xfrm rot="15274173">
-            <a:off x="6059728" y="779270"/>
-            <a:ext cx="4967533" cy="4988390"/>
-          </a:xfrm>
-          <a:prstGeom prst="ellipse">
-            <a:avLst/>
-          </a:prstGeom>
-          <a:gradFill>
-            <a:gsLst>
-              <a:gs pos="0">
-                <a:schemeClr val="accent1">
-                  <a:alpha val="24000"/>
-                </a:schemeClr>
-              </a:gs>
-              <a:gs pos="79000">
-                <a:schemeClr val="accent1">
-                  <a:lumMod val="60000"/>
-                  <a:lumOff val="40000"/>
-                  <a:alpha val="0"/>
-                </a:schemeClr>
-              </a:gs>
-            </a:gsLst>
-            <a:lin ang="14400000" scaled="0"/>
-          </a:gradFill>
-          <a:ln>
-            <a:noFill/>
-          </a:ln>
-        </p:spPr>
-        <p:style>
-          <a:lnRef idx="2">
-            <a:schemeClr val="accent1">
-              <a:shade val="50000"/>
-            </a:schemeClr>
-          </a:lnRef>
-          <a:fillRef idx="1">
-            <a:schemeClr val="accent1"/>
-          </a:fillRef>
-          <a:effectRef idx="0">
-            <a:schemeClr val="accent1"/>
-          </a:effectRef>
-          <a:fontRef idx="minor">
-            <a:schemeClr val="lt1"/>
-          </a:fontRef>
-        </p:style>
-        <p:txBody>
-          <a:bodyPr rtlCol="0" anchor="ctr"/>
-          <a:lstStyle/>
-          <a:p>
-            <a:pPr algn="ctr"/>
-            <a:endParaRPr lang="en-US" dirty="0"/>
-          </a:p>
-        </p:txBody>
-      </p:sp>
-      <p:sp>
-        <p:nvSpPr>
-          <p:cNvPr id="2" name="Title 1">
-            <a:extLst>
-              <a:ext uri="{FF2B5EF4-FFF2-40B4-BE49-F238E27FC236}">
-                <a16:creationId xmlns:a16="http://schemas.microsoft.com/office/drawing/2014/main" id="{AD3C32FD-06C8-E807-53FC-EFDF5884DEB9}"/>
-              </a:ext>
-            </a:extLst>
-          </p:cNvPr>
-          <p:cNvSpPr>
-            <a:spLocks noGrp="1"/>
-          </p:cNvSpPr>
-          <p:nvPr>
-            <p:ph type="title"/>
-          </p:nvPr>
-        </p:nvSpPr>
-        <p:spPr>
-          <a:xfrm>
-            <a:off x="1346225" y="321144"/>
-            <a:ext cx="8681695" cy="3268520"/>
-          </a:xfrm>
-        </p:spPr>
-        <p:txBody>
-          <a:bodyPr vert="horz" lIns="91440" tIns="45720" rIns="91440" bIns="45720" rtlCol="0" anchor="b">
-            <a:normAutofit/>
-          </a:bodyPr>
-          <a:lstStyle/>
-          <a:p>
-            <a:pPr algn="r"/>
-            <a:r>
-              <a:rPr lang="en-US" sz="4800" kern="1200" dirty="0">
-                <a:solidFill>
-                  <a:srgbClr val="FFFFFF"/>
-                </a:solidFill>
-                <a:latin typeface="+mj-lt"/>
-                <a:ea typeface="+mj-ea"/>
-                <a:cs typeface="+mj-cs"/>
-              </a:rPr>
-              <a:t>7. Discussion and Conclusion</a:t>
-            </a:r>
-          </a:p>
-        </p:txBody>
-      </p:sp>
-      <p:sp>
-        <p:nvSpPr>
-          <p:cNvPr id="17" name="Rectangle 16">
-            <a:extLst>
-              <a:ext uri="{FF2B5EF4-FFF2-40B4-BE49-F238E27FC236}">
-                <a16:creationId xmlns:a16="http://schemas.microsoft.com/office/drawing/2014/main" id="{8C516CC8-80AC-446C-A56E-9F54B7210402}"/>
-              </a:ext>
-              <a:ext uri="{C183D7F6-B498-43B3-948B-1728B52AA6E4}">
-                <adec:decorative xmlns:adec="http://schemas.microsoft.com/office/drawing/2017/decorative" val="1"/>
-              </a:ext>
-            </a:extLst>
-          </p:cNvPr>
-          <p:cNvSpPr>
-            <a:spLocks noGrp="1" noRot="1" noChangeAspect="1" noMove="1" noResize="1" noEditPoints="1" noAdjustHandles="1" noChangeArrowheads="1" noChangeShapeType="1" noTextEdit="1"/>
-          </p:cNvSpPr>
-          <p:nvPr>
-            <p:extLst>
-              <p:ext uri="{386F3935-93C4-4BCD-93E2-E3B085C9AB24}">
-                <p16:designElem xmlns:p16="http://schemas.microsoft.com/office/powerpoint/2015/main" val="1"/>
-              </p:ext>
-            </p:extLst>
-          </p:nvPr>
-        </p:nvSpPr>
-        <p:spPr>
-          <a:xfrm rot="10800000" flipH="1">
-            <a:off x="6314" y="4480038"/>
-            <a:ext cx="12179371" cy="2377962"/>
-          </a:xfrm>
-          <a:prstGeom prst="rect">
-            <a:avLst/>
-          </a:prstGeom>
-          <a:gradFill>
-            <a:gsLst>
-              <a:gs pos="0">
-                <a:schemeClr val="accent1">
-                  <a:lumMod val="75000"/>
-                  <a:alpha val="50000"/>
-                </a:schemeClr>
-              </a:gs>
-              <a:gs pos="99000">
-                <a:srgbClr val="000000">
-                  <a:alpha val="34000"/>
-                </a:srgbClr>
-              </a:gs>
-            </a:gsLst>
-            <a:lin ang="17400000" scaled="0"/>
-          </a:gradFill>
-          <a:ln>
-            <a:noFill/>
-          </a:ln>
-        </p:spPr>
-        <p:style>
-          <a:lnRef idx="2">
-            <a:schemeClr val="accent1">
-              <a:shade val="50000"/>
-            </a:schemeClr>
-          </a:lnRef>
-          <a:fillRef idx="1">
-            <a:schemeClr val="accent1"/>
-          </a:fillRef>
-          <a:effectRef idx="0">
-            <a:schemeClr val="accent1"/>
-          </a:effectRef>
-          <a:fontRef idx="minor">
-            <a:schemeClr val="lt1"/>
-          </a:fontRef>
-        </p:style>
-        <p:txBody>
-          <a:bodyPr rtlCol="0" anchor="ctr"/>
-          <a:lstStyle/>
-          <a:p>
-            <a:pPr algn="ctr"/>
-            <a:endParaRPr lang="en-US"/>
-          </a:p>
-        </p:txBody>
-      </p:sp>
-      <p:sp>
-        <p:nvSpPr>
-          <p:cNvPr id="19" name="Rectangle 18">
-            <a:extLst>
-              <a:ext uri="{FF2B5EF4-FFF2-40B4-BE49-F238E27FC236}">
-                <a16:creationId xmlns:a16="http://schemas.microsoft.com/office/drawing/2014/main" id="{53947E58-F088-49F1-A3D1-DEA690192E84}"/>
-              </a:ext>
-              <a:ext uri="{C183D7F6-B498-43B3-948B-1728B52AA6E4}">
-                <adec:decorative xmlns:adec="http://schemas.microsoft.com/office/drawing/2017/decorative" val="1"/>
-              </a:ext>
-            </a:extLst>
-          </p:cNvPr>
-          <p:cNvSpPr>
-            <a:spLocks noGrp="1" noRot="1" noChangeAspect="1" noMove="1" noResize="1" noEditPoints="1" noAdjustHandles="1" noChangeArrowheads="1" noChangeShapeType="1" noTextEdit="1"/>
-          </p:cNvSpPr>
-          <p:nvPr>
-            <p:extLst>
-              <p:ext uri="{386F3935-93C4-4BCD-93E2-E3B085C9AB24}">
-                <p16:designElem xmlns:p16="http://schemas.microsoft.com/office/powerpoint/2015/main" val="1"/>
-              </p:ext>
-            </p:extLst>
-          </p:nvPr>
-        </p:nvSpPr>
-        <p:spPr>
-          <a:xfrm rot="16200000" flipH="1">
-            <a:off x="6967085" y="1632660"/>
-            <a:ext cx="6857572" cy="3592258"/>
-          </a:xfrm>
-          <a:prstGeom prst="rect">
-            <a:avLst/>
-          </a:prstGeom>
-          <a:gradFill>
-            <a:gsLst>
-              <a:gs pos="0">
-                <a:schemeClr val="accent1">
-                  <a:lumMod val="75000"/>
-                  <a:alpha val="50000"/>
-                </a:schemeClr>
-              </a:gs>
-              <a:gs pos="99000">
-                <a:srgbClr val="000000">
-                  <a:alpha val="0"/>
-                </a:srgbClr>
-              </a:gs>
-            </a:gsLst>
-            <a:lin ang="15600000" scaled="0"/>
-          </a:gradFill>
-          <a:ln>
-            <a:noFill/>
-          </a:ln>
-        </p:spPr>
-        <p:style>
-          <a:lnRef idx="2">
-            <a:schemeClr val="accent1">
-              <a:shade val="50000"/>
-            </a:schemeClr>
-          </a:lnRef>
-          <a:fillRef idx="1">
-            <a:schemeClr val="accent1"/>
-          </a:fillRef>
-          <a:effectRef idx="0">
-            <a:schemeClr val="accent1"/>
-          </a:effectRef>
-          <a:fontRef idx="minor">
-            <a:schemeClr val="lt1"/>
-          </a:fontRef>
-        </p:style>
-        <p:txBody>
-          <a:bodyPr rtlCol="0" anchor="ctr"/>
-          <a:lstStyle/>
-          <a:p>
-            <a:pPr algn="ctr"/>
-            <a:endParaRPr lang="en-US"/>
-          </a:p>
-        </p:txBody>
-      </p:sp>
-    </p:spTree>
-    <p:extLst>
-      <p:ext uri="{BB962C8B-B14F-4D97-AF65-F5344CB8AC3E}">
-        <p14:creationId xmlns:p14="http://schemas.microsoft.com/office/powerpoint/2010/main" val="3071330222"/>
-      </p:ext>
-    </p:extLst>
-  </p:cSld>
-  <p:clrMapOvr>
-    <a:masterClrMapping/>
-  </p:clrMapOvr>
-  <p:timing>
-    <p:tnLst>
-      <p:par>
-        <p:cTn id="1" dur="indefinite" restart="never" nodeType="tmRoot">
-          <p:childTnLst>
-            <p:seq concurrent="1" nextAc="seek">
-              <p:cTn id="2" dur="indefinite" nodeType="mainSeq">
-                <p:childTnLst>
-                  <p:par>
-                    <p:cTn id="3" fill="hold">
-                      <p:stCondLst>
-                        <p:cond delay="indefinite"/>
-                        <p:cond evt="onBegin" delay="0">
-                          <p:tn val="2"/>
-                        </p:cond>
-                      </p:stCondLst>
-                      <p:childTnLst>
-                        <p:par>
-                          <p:cTn id="4" fill="hold">
-                            <p:stCondLst>
-                              <p:cond delay="0"/>
-                            </p:stCondLst>
-                            <p:childTnLst>
-                              <p:par>
-                                <p:cTn id="5" presetID="10" presetClass="entr" presetSubtype="0" fill="hold" grpId="0" nodeType="withEffect">
-                                  <p:stCondLst>
-                                    <p:cond delay="500"/>
-                                  </p:stCondLst>
-                                  <p:iterate type="wd">
-                                    <p:tmPct val="15000"/>
-                                  </p:iterate>
-                                  <p:childTnLst>
-                                    <p:set>
-                                      <p:cBhvr>
-                                        <p:cTn id="6" dur="1" fill="hold">
-                                          <p:stCondLst>
-                                            <p:cond delay="0"/>
-                                          </p:stCondLst>
-                                        </p:cTn>
-                                        <p:tgtEl>
-                                          <p:spTgt spid="2"/>
-                                        </p:tgtEl>
-                                        <p:attrNameLst>
-                                          <p:attrName>style.visibility</p:attrName>
-                                        </p:attrNameLst>
-                                      </p:cBhvr>
-                                      <p:to>
-                                        <p:strVal val="visible"/>
-                                      </p:to>
-                                    </p:set>
-                                    <p:animEffect transition="in" filter="fade">
-                                      <p:cBhvr>
-                                        <p:cTn id="7" dur="1000"/>
-                                        <p:tgtEl>
-                                          <p:spTgt spid="2"/>
-                                        </p:tgtEl>
-                                      </p:cBhvr>
-                                    </p:animEffect>
-                                  </p:childTnLst>
-                                </p:cTn>
-                              </p:par>
-                            </p:childTnLst>
-                          </p:cTn>
-                        </p:par>
-                      </p:childTnLst>
-                    </p:cTn>
-                  </p:par>
-                </p:childTnLst>
-              </p:cTn>
-              <p:prevCondLst>
-                <p:cond evt="onPrev" delay="0">
-                  <p:tgtEl>
-                    <p:sldTgt/>
-                  </p:tgtEl>
-                </p:cond>
-              </p:prevCondLst>
-              <p:nextCondLst>
-                <p:cond evt="onNext" delay="0">
-                  <p:tgtEl>
-                    <p:sldTgt/>
-                  </p:tgtEl>
-                </p:cond>
-              </p:nextCondLst>
-            </p:seq>
-          </p:childTnLst>
-        </p:cTn>
-      </p:par>
-    </p:tnLst>
-    <p:bldLst>
-      <p:bldP spid="2" grpId="0"/>
-    </p:bldLst>
-  </p:timing>
-</p:sld>
-</file>
-
-<file path=ppt/slides/slide21.xml><?xml version="1.0" encoding="utf-8"?>
 <p:sld xmlns:a="http://schemas.openxmlformats.org/drawingml/2006/main" xmlns:r="http://schemas.openxmlformats.org/officeDocument/2006/relationships" xmlns:p="http://schemas.openxmlformats.org/presentationml/2006/main">
   <p:cSld>
     <p:spTree>
@@ -18016,8 +18136,8 @@
         </p:nvSpPr>
         <p:spPr>
           <a:xfrm>
-            <a:off x="804671" y="2421682"/>
-            <a:ext cx="6764529" cy="3639289"/>
+            <a:off x="696113" y="1902547"/>
+            <a:ext cx="8809592" cy="4597931"/>
           </a:xfrm>
         </p:spPr>
         <p:txBody>
@@ -18031,26 +18151,26 @@
             </a:pPr>
             <a:r>
               <a:rPr lang="en-US" sz="3600" b="1" dirty="0"/>
-              <a:t>What prior research focuses on:</a:t>
+              <a:t>What prior research focuses on</a:t>
             </a:r>
             <a:endParaRPr lang="en-US" sz="3600" dirty="0"/>
           </a:p>
           <a:p>
-            <a:pPr marL="0" indent="0">
-              <a:buNone/>
-            </a:pPr>
             <a:r>
               <a:rPr lang="en-US" sz="3600" dirty="0"/>
               <a:t>Content quality (accuracy, bias) </a:t>
             </a:r>
           </a:p>
           <a:p>
-            <a:pPr marL="0" indent="0">
-              <a:buNone/>
-            </a:pPr>
             <a:r>
               <a:rPr lang="en-US" sz="3600" dirty="0"/>
               <a:t>Revision metrics (edits, reverts) </a:t>
+            </a:r>
+          </a:p>
+          <a:p>
+            <a:r>
+              <a:rPr lang="en-US" sz="3600" dirty="0"/>
+              <a:t>Conflict or burstiness, often separately </a:t>
             </a:r>
           </a:p>
           <a:p>
@@ -18059,17 +18179,20 @@
             </a:pPr>
             <a:r>
               <a:rPr lang="en-US" sz="3600" b="1" dirty="0"/>
-              <a:t>What is missing:</a:t>
+              <a:t>What is missing</a:t>
             </a:r>
             <a:endParaRPr lang="en-US" sz="3600" dirty="0"/>
           </a:p>
           <a:p>
-            <a:pPr marL="0" indent="0">
-              <a:buNone/>
-            </a:pPr>
             <a:r>
               <a:rPr lang="en-US" sz="3600" dirty="0"/>
-              <a:t>Temporal stability  and topic-specific instability </a:t>
+              <a:t>Temporal stability as a data quality issue </a:t>
+            </a:r>
+          </a:p>
+          <a:p>
+            <a:r>
+              <a:rPr lang="en-US" sz="3600" dirty="0"/>
+              <a:t>Topic-specific instability in diversity-related pages </a:t>
             </a:r>
           </a:p>
           <a:p>
@@ -18078,17 +18201,20 @@
             </a:pPr>
             <a:r>
               <a:rPr lang="en-US" sz="3600" b="1" dirty="0"/>
-              <a:t>This study sees:</a:t>
+              <a:t>This study</a:t>
             </a:r>
             <a:endParaRPr lang="en-US" sz="3600" dirty="0"/>
           </a:p>
           <a:p>
-            <a:pPr marL="0" indent="0">
-              <a:buNone/>
-            </a:pPr>
             <a:r>
               <a:rPr lang="en-US" sz="3600" dirty="0"/>
-              <a:t>Revert-related instability and bursty editing </a:t>
+              <a:t>Treats instability as a data quality problem </a:t>
+            </a:r>
+          </a:p>
+          <a:p>
+            <a:r>
+              <a:rPr lang="en-US" sz="3600" dirty="0"/>
+              <a:t>Compares structural, temporal, and revert-related instability </a:t>
             </a:r>
           </a:p>
           <a:p>
@@ -21751,7 +21877,7 @@
           <a:p>
             <a:r>
               <a:rPr lang="en-US" dirty="0"/>
-              <a:t>Data sources and definition</a:t>
+              <a:t>Data Sources and Definition</a:t>
             </a:r>
           </a:p>
         </p:txBody>
@@ -22025,7 +22151,7 @@
         <p:spPr>
           <a:xfrm>
             <a:off x="406200" y="254001"/>
-            <a:ext cx="8351720" cy="1708242"/>
+            <a:ext cx="9808954" cy="1708242"/>
           </a:xfrm>
         </p:spPr>
         <p:txBody>
@@ -22036,7 +22162,7 @@
           <a:p>
             <a:r>
               <a:rPr lang="en-US" dirty="0"/>
-              <a:t>Research Questions and hypothesis</a:t>
+              <a:t>Research Questions and Hypothesis</a:t>
             </a:r>
           </a:p>
         </p:txBody>
@@ -22059,7 +22185,7 @@
         </p:nvSpPr>
         <p:spPr>
           <a:xfrm>
-            <a:off x="335078" y="2145124"/>
+            <a:off x="584099" y="1962243"/>
             <a:ext cx="11023801" cy="3769835"/>
           </a:xfrm>
         </p:spPr>
@@ -22076,9 +22202,12 @@
               <a:rPr lang="en-US" b="1" dirty="0"/>
               <a:t>RQ1</a:t>
             </a:r>
+            <a:br>
+              <a:rPr lang="en-US" dirty="0"/>
+            </a:br>
             <a:r>
               <a:rPr lang="en-US" dirty="0"/>
-              <a:t>: Are diversity-related pages more unstable? </a:t>
+              <a:t>Are diversity-related pages more unstable?</a:t>
             </a:r>
           </a:p>
           <a:p>
@@ -22089,25 +22218,12 @@
               <a:rPr lang="en-US" b="1" dirty="0"/>
               <a:t>RQ2</a:t>
             </a:r>
-            <a:r>
-              <a:rPr lang="en-US" dirty="0"/>
-              <a:t>: What type of instability dominates?</a:t>
-            </a:r>
-          </a:p>
-          <a:p>
-            <a:pPr marL="0" indent="0">
-              <a:buNone/>
-            </a:pPr>
-            <a:r>
-              <a:rPr lang="en-US" dirty="0"/>
-              <a:t>   1) Structural instability (page level) </a:t>
-            </a:r>
             <a:br>
               <a:rPr lang="en-US" dirty="0"/>
             </a:br>
             <a:r>
               <a:rPr lang="en-US" dirty="0"/>
-              <a:t>     H1: Diversity-related pages show stronger editing bursts</a:t>
+              <a:t>What type of instability dominates?</a:t>
             </a:r>
           </a:p>
           <a:p>
@@ -22115,15 +22231,12 @@
               <a:buNone/>
             </a:pPr>
             <a:r>
-              <a:rPr lang="en-US" dirty="0"/>
-              <a:t>   2) Temporal instability (day level)</a:t>
+              <a:rPr lang="en-US" b="1" dirty="0"/>
+              <a:t>    	H1 (structural instability)</a:t>
             </a:r>
-            <a:br>
-              <a:rPr lang="en-US" dirty="0"/>
-            </a:br>
             <a:r>
               <a:rPr lang="en-US" dirty="0"/>
-              <a:t>     H2: Diversity-related pages are more likely to experience burst days</a:t>
+              <a:t>: higher edit concentration</a:t>
             </a:r>
           </a:p>
           <a:p>
@@ -22131,8 +22244,12 @@
               <a:buNone/>
             </a:pPr>
             <a:r>
+              <a:rPr lang="en-US" b="1" dirty="0"/>
+              <a:t>	H2 (temporal instability)</a:t>
+            </a:r>
+            <a:r>
               <a:rPr lang="en-US" dirty="0"/>
-              <a:t>3) Revert-based instability</a:t>
+              <a:t>: higher burst-day rates</a:t>
             </a:r>
           </a:p>
           <a:p>
@@ -22140,8 +22257,12 @@
               <a:buNone/>
             </a:pPr>
             <a:r>
+              <a:rPr lang="en-US" b="1" dirty="0"/>
+              <a:t>	H3 (revert-related instability)</a:t>
+            </a:r>
+            <a:r>
               <a:rPr lang="en-US" dirty="0"/>
-              <a:t>     H3: Diversity-related pages have higher revert-related instability</a:t>
+              <a:t>: higher reverted edit share</a:t>
             </a:r>
           </a:p>
           <a:p>
@@ -22152,9 +22273,12 @@
               <a:rPr lang="en-US" b="1" dirty="0"/>
               <a:t>RQ3</a:t>
             </a:r>
+            <a:br>
+              <a:rPr lang="en-US" dirty="0"/>
+            </a:br>
             <a:r>
               <a:rPr lang="en-US" dirty="0"/>
-              <a:t>: How can we mitigate instability?</a:t>
+              <a:t>How can instability be mitigated?</a:t>
             </a:r>
           </a:p>
         </p:txBody>
@@ -22255,7 +22379,7 @@
           <a:p>
             <a:r>
               <a:rPr lang="en-US" dirty="0"/>
-              <a:t>Types of Instability</a:t>
+              <a:t>Types of Instability in RQ1 &amp; RQ2</a:t>
             </a:r>
             <a:br>
               <a:rPr lang="en-US" b="1" dirty="0"/>
@@ -22282,7 +22406,7 @@
         </p:nvSpPr>
         <p:spPr>
           <a:xfrm>
-            <a:off x="2707640" y="2628265"/>
+            <a:off x="2568302" y="1958657"/>
             <a:ext cx="10515600" cy="4351338"/>
           </a:xfrm>
         </p:spPr>
@@ -22293,64 +22417,72 @@
           <a:lstStyle/>
           <a:p>
             <a:r>
-              <a:rPr lang="en-US" sz="3200" b="1" dirty="0"/>
+              <a:rPr lang="en-US" dirty="0"/>
+              <a:t> </a:t>
+            </a:r>
+            <a:r>
+              <a:rPr lang="en-US" b="1" dirty="0"/>
               <a:t>Structural instability (page level)</a:t>
             </a:r>
             <a:br>
-              <a:rPr lang="en-US" sz="3200" dirty="0"/>
+              <a:rPr lang="en-US" dirty="0"/>
             </a:br>
             <a:r>
-              <a:rPr lang="en-US" sz="3200" dirty="0"/>
-              <a:t>→ edit concentration across days (</a:t>
+              <a:rPr lang="en-US" dirty="0"/>
+              <a:t>→ concentration of edits within a small number of days (</a:t>
             </a:r>
             <a:r>
-              <a:rPr lang="en-US" sz="3200" b="1" dirty="0"/>
+              <a:rPr lang="en-US" b="1" dirty="0"/>
               <a:t>H1</a:t>
             </a:r>
             <a:r>
-              <a:rPr lang="en-US" sz="3200" dirty="0"/>
-              <a:t>) </a:t>
+              <a:rPr lang="en-US" dirty="0"/>
+              <a:t>)</a:t>
             </a:r>
           </a:p>
           <a:p>
             <a:r>
-              <a:rPr lang="en-US" sz="3200" b="1" dirty="0"/>
+              <a:rPr lang="en-US" b="1" dirty="0"/>
               <a:t>Temporal instability (day level)</a:t>
             </a:r>
             <a:br>
-              <a:rPr lang="en-US" sz="3200" dirty="0"/>
+              <a:rPr lang="en-US" dirty="0"/>
             </a:br>
             <a:r>
-              <a:rPr lang="en-US" sz="3200" dirty="0"/>
-              <a:t>→ burst days / unusual activity spikes (</a:t>
+              <a:rPr lang="en-US" dirty="0"/>
+              <a:t>→ burst-day rates within a page (</a:t>
             </a:r>
             <a:r>
-              <a:rPr lang="en-US" sz="3200" b="1" dirty="0"/>
+              <a:rPr lang="en-US" b="1" dirty="0"/>
               <a:t>H2</a:t>
             </a:r>
             <a:r>
-              <a:rPr lang="en-US" sz="3200" dirty="0"/>
-              <a:t>) </a:t>
+              <a:rPr lang="en-US" dirty="0"/>
+              <a:t>)</a:t>
             </a:r>
           </a:p>
           <a:p>
             <a:r>
-              <a:rPr lang="en-US" sz="3200" b="1" dirty="0"/>
+              <a:rPr lang="en-US" dirty="0"/>
+              <a:t> </a:t>
+            </a:r>
+            <a:r>
+              <a:rPr lang="en-US" b="1" dirty="0"/>
               <a:t>Revert-related instability</a:t>
             </a:r>
             <a:br>
-              <a:rPr lang="en-US" sz="3200" dirty="0"/>
+              <a:rPr lang="en-US" dirty="0"/>
             </a:br>
             <a:r>
-              <a:rPr lang="en-US" sz="3200" dirty="0"/>
-              <a:t>→ reverted edits / editorial disagreement (</a:t>
+              <a:rPr lang="en-US" dirty="0"/>
+              <a:t>→ share of reverted edits (editorial conflict) (</a:t>
             </a:r>
             <a:r>
-              <a:rPr lang="en-US" sz="3200" b="1" dirty="0"/>
+              <a:rPr lang="en-US" b="1" dirty="0"/>
               <a:t>H3</a:t>
             </a:r>
             <a:r>
-              <a:rPr lang="en-US" sz="3200" dirty="0"/>
+              <a:rPr lang="en-US" dirty="0"/>
               <a:t>)</a:t>
             </a:r>
           </a:p>
